--- a/docs/발표자료.pptx
+++ b/docs/발표자료.pptx
@@ -11184,12 +11184,20 @@
           </a:p>
         </p:txBody>
       </p:sp>
-      <p:sp>
-        <p:nvSpPr>
-          <p:cNvPr id="9" name="Rectangle 8"/>
-          <p:cNvSpPr/>
-          <p:nvPr/>
-        </p:nvSpPr>
+      <p:pic>
+        <p:nvPicPr>
+          <p:cNvPr id="9" name="Picture 8" descr="send큐 적용 이전.png"/>
+          <p:cNvPicPr>
+            <a:picLocks noChangeAspect="1"/>
+          </p:cNvPicPr>
+          <p:nvPr/>
+        </p:nvPicPr>
+        <p:blipFill>
+          <a:blip r:embed="rId2"/>
+          <a:stretch>
+            <a:fillRect/>
+          </a:stretch>
+        </p:blipFill>
         <p:spPr>
           <a:xfrm>
             <a:off x="365760" y="3931920"/>
@@ -11198,72 +11206,11 @@
           <a:prstGeom prst="rect">
             <a:avLst/>
           </a:prstGeom>
-          <a:solidFill>
-            <a:srgbClr val="E8E8E8"/>
-          </a:solidFill>
-          <a:ln>
-            <a:noFill/>
-          </a:ln>
-        </p:spPr>
-        <p:style>
-          <a:lnRef idx="1">
-            <a:schemeClr val="accent1"/>
-          </a:lnRef>
-          <a:fillRef idx="3">
-            <a:schemeClr val="accent1"/>
-          </a:fillRef>
-          <a:effectRef idx="2">
-            <a:schemeClr val="accent1"/>
-          </a:effectRef>
-          <a:fontRef idx="minor">
-            <a:schemeClr val="lt1"/>
-          </a:fontRef>
-        </p:style>
-        <p:txBody>
-          <a:bodyPr rtlCol="0" anchor="ctr"/>
-          <a:lstStyle/>
-          <a:p>
-            <a:pPr algn="ctr"/>
-          </a:p>
-        </p:txBody>
-      </p:sp>
-      <p:sp>
-        <p:nvSpPr>
-          <p:cNvPr id="10" name="TextBox 9"/>
-          <p:cNvSpPr txBox="1"/>
-          <p:nvPr/>
-        </p:nvSpPr>
-        <p:spPr>
-          <a:xfrm>
-            <a:off x="365760" y="4480560"/>
-            <a:ext cx="5394960" cy="1188720"/>
-          </a:xfrm>
-          <a:prstGeom prst="rect">
-            <a:avLst/>
-          </a:prstGeom>
-          <a:noFill/>
-        </p:spPr>
-        <p:txBody>
-          <a:bodyPr wrap="square"/>
-          <a:lstStyle/>
-          <a:p>
-            <a:pPr algn="ctr"/>
-            <a:r>
-              <a:rPr sz="1400" b="0" i="0">
-                <a:solidFill>
-                  <a:srgbClr val="556575"/>
-                </a:solidFill>
-                <a:latin typeface="맑은 고딕"/>
-              </a:rPr>
-              <a:t>📷  스크린샷 삽입
-(최적화 적용 전 성능 측정)</a:t>
-            </a:r>
-          </a:p>
-        </p:txBody>
-      </p:sp>
-      <p:sp>
-        <p:nvSpPr>
-          <p:cNvPr id="11" name="Rectangle 10"/>
+        </p:spPr>
+      </p:pic>
+      <p:sp>
+        <p:nvSpPr>
+          <p:cNvPr id="10" name="Rectangle 9"/>
           <p:cNvSpPr/>
           <p:nvPr/>
         </p:nvSpPr>
@@ -11306,7 +11253,7 @@
       </p:sp>
       <p:sp>
         <p:nvSpPr>
-          <p:cNvPr id="12" name="TextBox 11"/>
+          <p:cNvPr id="11" name="TextBox 10"/>
           <p:cNvSpPr txBox="1"/>
           <p:nvPr/>
         </p:nvSpPr>
@@ -11339,7 +11286,7 @@
       </p:sp>
       <p:sp>
         <p:nvSpPr>
-          <p:cNvPr id="13" name="Rectangle 12"/>
+          <p:cNvPr id="12" name="Rectangle 11"/>
           <p:cNvSpPr/>
           <p:nvPr/>
         </p:nvSpPr>
@@ -11382,7 +11329,7 @@
       </p:sp>
       <p:sp>
         <p:nvSpPr>
-          <p:cNvPr id="14" name="TextBox 13"/>
+          <p:cNvPr id="13" name="TextBox 12"/>
           <p:cNvSpPr txBox="1"/>
           <p:nvPr/>
         </p:nvSpPr>
@@ -11483,12 +11430,20 @@
           </a:p>
         </p:txBody>
       </p:sp>
-      <p:sp>
-        <p:nvSpPr>
-          <p:cNvPr id="15" name="Rectangle 14"/>
-          <p:cNvSpPr/>
-          <p:nvPr/>
-        </p:nvSpPr>
+      <p:pic>
+        <p:nvPicPr>
+          <p:cNvPr id="14" name="Picture 13" descr="send큐 적용 이후 성능 테스트.png"/>
+          <p:cNvPicPr>
+            <a:picLocks noChangeAspect="1"/>
+          </p:cNvPicPr>
+          <p:nvPr/>
+        </p:nvPicPr>
+        <p:blipFill>
+          <a:blip r:embed="rId3"/>
+          <a:stretch>
+            <a:fillRect/>
+          </a:stretch>
+        </p:blipFill>
         <p:spPr>
           <a:xfrm>
             <a:off x="6400800" y="3931920"/>
@@ -11497,72 +11452,11 @@
           <a:prstGeom prst="rect">
             <a:avLst/>
           </a:prstGeom>
-          <a:solidFill>
-            <a:srgbClr val="E8E8E8"/>
-          </a:solidFill>
-          <a:ln>
-            <a:noFill/>
-          </a:ln>
-        </p:spPr>
-        <p:style>
-          <a:lnRef idx="1">
-            <a:schemeClr val="accent1"/>
-          </a:lnRef>
-          <a:fillRef idx="3">
-            <a:schemeClr val="accent1"/>
-          </a:fillRef>
-          <a:effectRef idx="2">
-            <a:schemeClr val="accent1"/>
-          </a:effectRef>
-          <a:fontRef idx="minor">
-            <a:schemeClr val="lt1"/>
-          </a:fontRef>
-        </p:style>
-        <p:txBody>
-          <a:bodyPr rtlCol="0" anchor="ctr"/>
-          <a:lstStyle/>
-          <a:p>
-            <a:pPr algn="ctr"/>
-          </a:p>
-        </p:txBody>
-      </p:sp>
-      <p:sp>
-        <p:nvSpPr>
-          <p:cNvPr id="16" name="TextBox 15"/>
-          <p:cNvSpPr txBox="1"/>
-          <p:nvPr/>
-        </p:nvSpPr>
-        <p:spPr>
-          <a:xfrm>
-            <a:off x="6400800" y="4480560"/>
-            <a:ext cx="5394960" cy="1188720"/>
-          </a:xfrm>
-          <a:prstGeom prst="rect">
-            <a:avLst/>
-          </a:prstGeom>
-          <a:noFill/>
-        </p:spPr>
-        <p:txBody>
-          <a:bodyPr wrap="square"/>
-          <a:lstStyle/>
-          <a:p>
-            <a:pPr algn="ctr"/>
-            <a:r>
-              <a:rPr sz="1400" b="0" i="0">
-                <a:solidFill>
-                  <a:srgbClr val="556575"/>
-                </a:solidFill>
-                <a:latin typeface="맑은 고딕"/>
-              </a:rPr>
-              <a:t>📷  스크린샷 삽입
-(최적화 적용 후 성능 측정)</a:t>
-            </a:r>
-          </a:p>
-        </p:txBody>
-      </p:sp>
-      <p:sp>
-        <p:nvSpPr>
-          <p:cNvPr id="17" name="TextBox 16"/>
+        </p:spPr>
+      </p:pic>
+      <p:sp>
+        <p:nvSpPr>
+          <p:cNvPr id="15" name="TextBox 14"/>
           <p:cNvSpPr txBox="1"/>
           <p:nvPr/>
         </p:nvSpPr>

--- a/docs/발표자료.pptx
+++ b/docs/발표자료.pptx
@@ -5,19 +5,19 @@
     <p:sldMasterId id="2147483648" r:id="rId1"/>
   </p:sldMasterIdLst>
   <p:sldIdLst>
-    <p:sldId id="256" r:id="rId7"/>
-    <p:sldId id="257" r:id="rId8"/>
-    <p:sldId id="258" r:id="rId9"/>
-    <p:sldId id="259" r:id="rId10"/>
-    <p:sldId id="260" r:id="rId11"/>
-    <p:sldId id="261" r:id="rId12"/>
-    <p:sldId id="262" r:id="rId13"/>
-    <p:sldId id="263" r:id="rId14"/>
-    <p:sldId id="264" r:id="rId15"/>
-    <p:sldId id="265" r:id="rId16"/>
-    <p:sldId id="266" r:id="rId17"/>
+    <p:sldId id="256" r:id="rId2"/>
+    <p:sldId id="257" r:id="rId3"/>
+    <p:sldId id="258" r:id="rId4"/>
+    <p:sldId id="259" r:id="rId5"/>
+    <p:sldId id="260" r:id="rId6"/>
+    <p:sldId id="261" r:id="rId7"/>
+    <p:sldId id="262" r:id="rId8"/>
+    <p:sldId id="263" r:id="rId9"/>
+    <p:sldId id="264" r:id="rId10"/>
+    <p:sldId id="265" r:id="rId11"/>
+    <p:sldId id="266" r:id="rId12"/>
   </p:sldIdLst>
-  <p:sldSz cx="12188952" cy="6858000" type="screen4x3"/>
+  <p:sldSz cx="12188825" cy="6858000"/>
   <p:notesSz cx="6858000" cy="9144000"/>
   <p:defaultTextStyle>
     <a:defPPr>
@@ -114,6 +114,22 @@
       </a:defRPr>
     </a:lvl9pPr>
   </p:defaultTextStyle>
+  <p:extLst>
+    <p:ext uri="{EFAFB233-063F-42B5-8137-9DF3F51BA10A}">
+      <p15:sldGuideLst xmlns:p15="http://schemas.microsoft.com/office/powerpoint/2012/main">
+        <p15:guide id="1" orient="horz" pos="2160">
+          <p15:clr>
+            <a:srgbClr val="A4A3A4"/>
+          </p15:clr>
+        </p15:guide>
+        <p15:guide id="2" pos="2880">
+          <p15:clr>
+            <a:srgbClr val="A4A3A4"/>
+          </p15:clr>
+        </p15:guide>
+      </p15:sldGuideLst>
+    </p:ext>
+  </p:extLst>
 </p:presentation>
 </file>
 
@@ -155,10 +171,9 @@
           <a:lstStyle/>
           <a:p>
             <a:r>
-              <a:rPr lang="en-US" smtClean="0"/>
+              <a:rPr lang="en-US"/>
               <a:t>Click to edit Master title style</a:t>
             </a:r>
-            <a:endParaRPr lang="en-US"/>
           </a:p>
         </p:txBody>
       </p:sp>
@@ -274,10 +289,9 @@
           </a:lstStyle>
           <a:p>
             <a:r>
-              <a:rPr lang="en-US" smtClean="0"/>
+              <a:rPr lang="en-US"/>
               <a:t>Click to edit Master subtitle style</a:t>
             </a:r>
-            <a:endParaRPr lang="en-US"/>
           </a:p>
         </p:txBody>
       </p:sp>
@@ -298,7 +312,7 @@
           <a:p>
             <a:fld id="{5BCAD085-E8A6-8845-BD4E-CB4CCA059FC4}" type="datetimeFigureOut">
               <a:rPr lang="en-US" smtClean="0"/>
-              <a:t>1/27/13</a:t>
+              <a:t>6/16/2026</a:t>
             </a:fld>
             <a:endParaRPr lang="en-US"/>
           </a:p>
@@ -392,10 +406,9 @@
           <a:lstStyle/>
           <a:p>
             <a:r>
-              <a:rPr lang="en-US" smtClean="0"/>
+              <a:rPr lang="en-US"/>
               <a:t>Click to edit Master title style</a:t>
             </a:r>
-            <a:endParaRPr lang="en-US"/>
           </a:p>
         </p:txBody>
       </p:sp>
@@ -416,38 +429,37 @@
           <a:p>
             <a:pPr lvl="0"/>
             <a:r>
-              <a:rPr lang="en-US" smtClean="0"/>
+              <a:rPr lang="en-US"/>
               <a:t>Click to edit Master text styles</a:t>
             </a:r>
           </a:p>
           <a:p>
             <a:pPr lvl="1"/>
             <a:r>
-              <a:rPr lang="en-US" smtClean="0"/>
+              <a:rPr lang="en-US"/>
               <a:t>Second level</a:t>
             </a:r>
           </a:p>
           <a:p>
             <a:pPr lvl="2"/>
             <a:r>
-              <a:rPr lang="en-US" smtClean="0"/>
+              <a:rPr lang="en-US"/>
               <a:t>Third level</a:t>
             </a:r>
           </a:p>
           <a:p>
             <a:pPr lvl="3"/>
             <a:r>
-              <a:rPr lang="en-US" smtClean="0"/>
+              <a:rPr lang="en-US"/>
               <a:t>Fourth level</a:t>
             </a:r>
           </a:p>
           <a:p>
             <a:pPr lvl="4"/>
             <a:r>
-              <a:rPr lang="en-US" smtClean="0"/>
+              <a:rPr lang="en-US"/>
               <a:t>Fifth level</a:t>
             </a:r>
-            <a:endParaRPr lang="en-US"/>
           </a:p>
         </p:txBody>
       </p:sp>
@@ -468,7 +480,7 @@
           <a:p>
             <a:fld id="{5BCAD085-E8A6-8845-BD4E-CB4CCA059FC4}" type="datetimeFigureOut">
               <a:rPr lang="en-US" smtClean="0"/>
-              <a:t>1/27/13</a:t>
+              <a:t>6/16/2026</a:t>
             </a:fld>
             <a:endParaRPr lang="en-US"/>
           </a:p>
@@ -567,10 +579,9 @@
           <a:lstStyle/>
           <a:p>
             <a:r>
-              <a:rPr lang="en-US" smtClean="0"/>
+              <a:rPr lang="en-US"/>
               <a:t>Click to edit Master title style</a:t>
             </a:r>
-            <a:endParaRPr lang="en-US"/>
           </a:p>
         </p:txBody>
       </p:sp>
@@ -596,38 +607,37 @@
           <a:p>
             <a:pPr lvl="0"/>
             <a:r>
-              <a:rPr lang="en-US" smtClean="0"/>
+              <a:rPr lang="en-US"/>
               <a:t>Click to edit Master text styles</a:t>
             </a:r>
           </a:p>
           <a:p>
             <a:pPr lvl="1"/>
             <a:r>
-              <a:rPr lang="en-US" smtClean="0"/>
+              <a:rPr lang="en-US"/>
               <a:t>Second level</a:t>
             </a:r>
           </a:p>
           <a:p>
             <a:pPr lvl="2"/>
             <a:r>
-              <a:rPr lang="en-US" smtClean="0"/>
+              <a:rPr lang="en-US"/>
               <a:t>Third level</a:t>
             </a:r>
           </a:p>
           <a:p>
             <a:pPr lvl="3"/>
             <a:r>
-              <a:rPr lang="en-US" smtClean="0"/>
+              <a:rPr lang="en-US"/>
               <a:t>Fourth level</a:t>
             </a:r>
           </a:p>
           <a:p>
             <a:pPr lvl="4"/>
             <a:r>
-              <a:rPr lang="en-US" smtClean="0"/>
+              <a:rPr lang="en-US"/>
               <a:t>Fifth level</a:t>
             </a:r>
-            <a:endParaRPr lang="en-US"/>
           </a:p>
         </p:txBody>
       </p:sp>
@@ -648,7 +658,7 @@
           <a:p>
             <a:fld id="{5BCAD085-E8A6-8845-BD4E-CB4CCA059FC4}" type="datetimeFigureOut">
               <a:rPr lang="en-US" smtClean="0"/>
-              <a:t>1/27/13</a:t>
+              <a:t>6/16/2026</a:t>
             </a:fld>
             <a:endParaRPr lang="en-US"/>
           </a:p>
@@ -742,10 +752,9 @@
           <a:lstStyle/>
           <a:p>
             <a:r>
-              <a:rPr lang="en-US" smtClean="0"/>
+              <a:rPr lang="en-US"/>
               <a:t>Click to edit Master title style</a:t>
             </a:r>
-            <a:endParaRPr lang="en-US"/>
           </a:p>
         </p:txBody>
       </p:sp>
@@ -766,38 +775,37 @@
           <a:p>
             <a:pPr lvl="0"/>
             <a:r>
-              <a:rPr lang="en-US" smtClean="0"/>
+              <a:rPr lang="en-US"/>
               <a:t>Click to edit Master text styles</a:t>
             </a:r>
           </a:p>
           <a:p>
             <a:pPr lvl="1"/>
             <a:r>
-              <a:rPr lang="en-US" smtClean="0"/>
+              <a:rPr lang="en-US"/>
               <a:t>Second level</a:t>
             </a:r>
           </a:p>
           <a:p>
             <a:pPr lvl="2"/>
             <a:r>
-              <a:rPr lang="en-US" smtClean="0"/>
+              <a:rPr lang="en-US"/>
               <a:t>Third level</a:t>
             </a:r>
           </a:p>
           <a:p>
             <a:pPr lvl="3"/>
             <a:r>
-              <a:rPr lang="en-US" smtClean="0"/>
+              <a:rPr lang="en-US"/>
               <a:t>Fourth level</a:t>
             </a:r>
           </a:p>
           <a:p>
             <a:pPr lvl="4"/>
             <a:r>
-              <a:rPr lang="en-US" smtClean="0"/>
+              <a:rPr lang="en-US"/>
               <a:t>Fifth level</a:t>
             </a:r>
-            <a:endParaRPr lang="en-US"/>
           </a:p>
         </p:txBody>
       </p:sp>
@@ -818,7 +826,7 @@
           <a:p>
             <a:fld id="{5BCAD085-E8A6-8845-BD4E-CB4CCA059FC4}" type="datetimeFigureOut">
               <a:rPr lang="en-US" smtClean="0"/>
-              <a:t>1/27/13</a:t>
+              <a:t>6/16/2026</a:t>
             </a:fld>
             <a:endParaRPr lang="en-US"/>
           </a:p>
@@ -921,10 +929,9 @@
           </a:lstStyle>
           <a:p>
             <a:r>
-              <a:rPr lang="en-US" smtClean="0"/>
+              <a:rPr lang="en-US"/>
               <a:t>Click to edit Master title style</a:t>
             </a:r>
-            <a:endParaRPr lang="en-US"/>
           </a:p>
         </p:txBody>
       </p:sp>
@@ -1041,7 +1048,7 @@
           <a:p>
             <a:pPr lvl="0"/>
             <a:r>
-              <a:rPr lang="en-US" smtClean="0"/>
+              <a:rPr lang="en-US"/>
               <a:t>Click to edit Master text styles</a:t>
             </a:r>
           </a:p>
@@ -1064,7 +1071,7 @@
           <a:p>
             <a:fld id="{5BCAD085-E8A6-8845-BD4E-CB4CCA059FC4}" type="datetimeFigureOut">
               <a:rPr lang="en-US" smtClean="0"/>
-              <a:t>1/27/13</a:t>
+              <a:t>6/16/2026</a:t>
             </a:fld>
             <a:endParaRPr lang="en-US"/>
           </a:p>
@@ -1158,10 +1165,9 @@
           <a:lstStyle/>
           <a:p>
             <a:r>
-              <a:rPr lang="en-US" smtClean="0"/>
+              <a:rPr lang="en-US"/>
               <a:t>Click to edit Master title style</a:t>
             </a:r>
-            <a:endParaRPr lang="en-US"/>
           </a:p>
         </p:txBody>
       </p:sp>
@@ -1215,38 +1221,37 @@
           <a:p>
             <a:pPr lvl="0"/>
             <a:r>
-              <a:rPr lang="en-US" smtClean="0"/>
+              <a:rPr lang="en-US"/>
               <a:t>Click to edit Master text styles</a:t>
             </a:r>
           </a:p>
           <a:p>
             <a:pPr lvl="1"/>
             <a:r>
-              <a:rPr lang="en-US" smtClean="0"/>
+              <a:rPr lang="en-US"/>
               <a:t>Second level</a:t>
             </a:r>
           </a:p>
           <a:p>
             <a:pPr lvl="2"/>
             <a:r>
-              <a:rPr lang="en-US" smtClean="0"/>
+              <a:rPr lang="en-US"/>
               <a:t>Third level</a:t>
             </a:r>
           </a:p>
           <a:p>
             <a:pPr lvl="3"/>
             <a:r>
-              <a:rPr lang="en-US" smtClean="0"/>
+              <a:rPr lang="en-US"/>
               <a:t>Fourth level</a:t>
             </a:r>
           </a:p>
           <a:p>
             <a:pPr lvl="4"/>
             <a:r>
-              <a:rPr lang="en-US" smtClean="0"/>
+              <a:rPr lang="en-US"/>
               <a:t>Fifth level</a:t>
             </a:r>
-            <a:endParaRPr lang="en-US"/>
           </a:p>
         </p:txBody>
       </p:sp>
@@ -1300,38 +1305,37 @@
           <a:p>
             <a:pPr lvl="0"/>
             <a:r>
-              <a:rPr lang="en-US" smtClean="0"/>
+              <a:rPr lang="en-US"/>
               <a:t>Click to edit Master text styles</a:t>
             </a:r>
           </a:p>
           <a:p>
             <a:pPr lvl="1"/>
             <a:r>
-              <a:rPr lang="en-US" smtClean="0"/>
+              <a:rPr lang="en-US"/>
               <a:t>Second level</a:t>
             </a:r>
           </a:p>
           <a:p>
             <a:pPr lvl="2"/>
             <a:r>
-              <a:rPr lang="en-US" smtClean="0"/>
+              <a:rPr lang="en-US"/>
               <a:t>Third level</a:t>
             </a:r>
           </a:p>
           <a:p>
             <a:pPr lvl="3"/>
             <a:r>
-              <a:rPr lang="en-US" smtClean="0"/>
+              <a:rPr lang="en-US"/>
               <a:t>Fourth level</a:t>
             </a:r>
           </a:p>
           <a:p>
             <a:pPr lvl="4"/>
             <a:r>
-              <a:rPr lang="en-US" smtClean="0"/>
+              <a:rPr lang="en-US"/>
               <a:t>Fifth level</a:t>
             </a:r>
-            <a:endParaRPr lang="en-US"/>
           </a:p>
         </p:txBody>
       </p:sp>
@@ -1352,7 +1356,7 @@
           <a:p>
             <a:fld id="{5BCAD085-E8A6-8845-BD4E-CB4CCA059FC4}" type="datetimeFigureOut">
               <a:rPr lang="en-US" smtClean="0"/>
-              <a:t>1/27/13</a:t>
+              <a:t>6/16/2026</a:t>
             </a:fld>
             <a:endParaRPr lang="en-US"/>
           </a:p>
@@ -1450,10 +1454,9 @@
           </a:lstStyle>
           <a:p>
             <a:r>
-              <a:rPr lang="en-US" smtClean="0"/>
+              <a:rPr lang="en-US"/>
               <a:t>Click to edit Master title style</a:t>
             </a:r>
-            <a:endParaRPr lang="en-US"/>
           </a:p>
         </p:txBody>
       </p:sp>
@@ -1516,7 +1519,7 @@
           <a:p>
             <a:pPr lvl="0"/>
             <a:r>
-              <a:rPr lang="en-US" smtClean="0"/>
+              <a:rPr lang="en-US"/>
               <a:t>Click to edit Master text styles</a:t>
             </a:r>
           </a:p>
@@ -1572,38 +1575,37 @@
           <a:p>
             <a:pPr lvl="0"/>
             <a:r>
-              <a:rPr lang="en-US" smtClean="0"/>
+              <a:rPr lang="en-US"/>
               <a:t>Click to edit Master text styles</a:t>
             </a:r>
           </a:p>
           <a:p>
             <a:pPr lvl="1"/>
             <a:r>
-              <a:rPr lang="en-US" smtClean="0"/>
+              <a:rPr lang="en-US"/>
               <a:t>Second level</a:t>
             </a:r>
           </a:p>
           <a:p>
             <a:pPr lvl="2"/>
             <a:r>
-              <a:rPr lang="en-US" smtClean="0"/>
+              <a:rPr lang="en-US"/>
               <a:t>Third level</a:t>
             </a:r>
           </a:p>
           <a:p>
             <a:pPr lvl="3"/>
             <a:r>
-              <a:rPr lang="en-US" smtClean="0"/>
+              <a:rPr lang="en-US"/>
               <a:t>Fourth level</a:t>
             </a:r>
           </a:p>
           <a:p>
             <a:pPr lvl="4"/>
             <a:r>
-              <a:rPr lang="en-US" smtClean="0"/>
+              <a:rPr lang="en-US"/>
               <a:t>Fifth level</a:t>
             </a:r>
-            <a:endParaRPr lang="en-US"/>
           </a:p>
         </p:txBody>
       </p:sp>
@@ -1666,7 +1668,7 @@
           <a:p>
             <a:pPr lvl="0"/>
             <a:r>
-              <a:rPr lang="en-US" smtClean="0"/>
+              <a:rPr lang="en-US"/>
               <a:t>Click to edit Master text styles</a:t>
             </a:r>
           </a:p>
@@ -1722,38 +1724,37 @@
           <a:p>
             <a:pPr lvl="0"/>
             <a:r>
-              <a:rPr lang="en-US" smtClean="0"/>
+              <a:rPr lang="en-US"/>
               <a:t>Click to edit Master text styles</a:t>
             </a:r>
           </a:p>
           <a:p>
             <a:pPr lvl="1"/>
             <a:r>
-              <a:rPr lang="en-US" smtClean="0"/>
+              <a:rPr lang="en-US"/>
               <a:t>Second level</a:t>
             </a:r>
           </a:p>
           <a:p>
             <a:pPr lvl="2"/>
             <a:r>
-              <a:rPr lang="en-US" smtClean="0"/>
+              <a:rPr lang="en-US"/>
               <a:t>Third level</a:t>
             </a:r>
           </a:p>
           <a:p>
             <a:pPr lvl="3"/>
             <a:r>
-              <a:rPr lang="en-US" smtClean="0"/>
+              <a:rPr lang="en-US"/>
               <a:t>Fourth level</a:t>
             </a:r>
           </a:p>
           <a:p>
             <a:pPr lvl="4"/>
             <a:r>
-              <a:rPr lang="en-US" smtClean="0"/>
+              <a:rPr lang="en-US"/>
               <a:t>Fifth level</a:t>
             </a:r>
-            <a:endParaRPr lang="en-US"/>
           </a:p>
         </p:txBody>
       </p:sp>
@@ -1774,7 +1775,7 @@
           <a:p>
             <a:fld id="{5BCAD085-E8A6-8845-BD4E-CB4CCA059FC4}" type="datetimeFigureOut">
               <a:rPr lang="en-US" smtClean="0"/>
-              <a:t>1/27/13</a:t>
+              <a:t>6/16/2026</a:t>
             </a:fld>
             <a:endParaRPr lang="en-US"/>
           </a:p>
@@ -1868,10 +1869,9 @@
           <a:lstStyle/>
           <a:p>
             <a:r>
-              <a:rPr lang="en-US" smtClean="0"/>
+              <a:rPr lang="en-US"/>
               <a:t>Click to edit Master title style</a:t>
             </a:r>
-            <a:endParaRPr lang="en-US"/>
           </a:p>
         </p:txBody>
       </p:sp>
@@ -1892,7 +1892,7 @@
           <a:p>
             <a:fld id="{5BCAD085-E8A6-8845-BD4E-CB4CCA059FC4}" type="datetimeFigureOut">
               <a:rPr lang="en-US" smtClean="0"/>
-              <a:t>1/27/13</a:t>
+              <a:t>6/16/2026</a:t>
             </a:fld>
             <a:endParaRPr lang="en-US"/>
           </a:p>
@@ -1987,7 +1987,7 @@
           <a:p>
             <a:fld id="{5BCAD085-E8A6-8845-BD4E-CB4CCA059FC4}" type="datetimeFigureOut">
               <a:rPr lang="en-US" smtClean="0"/>
-              <a:t>1/27/13</a:t>
+              <a:t>6/16/2026</a:t>
             </a:fld>
             <a:endParaRPr lang="en-US"/>
           </a:p>
@@ -2090,10 +2090,9 @@
           </a:lstStyle>
           <a:p>
             <a:r>
-              <a:rPr lang="en-US" smtClean="0"/>
+              <a:rPr lang="en-US"/>
               <a:t>Click to edit Master title style</a:t>
             </a:r>
-            <a:endParaRPr lang="en-US"/>
           </a:p>
         </p:txBody>
       </p:sp>
@@ -2147,38 +2146,37 @@
           <a:p>
             <a:pPr lvl="0"/>
             <a:r>
-              <a:rPr lang="en-US" smtClean="0"/>
+              <a:rPr lang="en-US"/>
               <a:t>Click to edit Master text styles</a:t>
             </a:r>
           </a:p>
           <a:p>
             <a:pPr lvl="1"/>
             <a:r>
-              <a:rPr lang="en-US" smtClean="0"/>
+              <a:rPr lang="en-US"/>
               <a:t>Second level</a:t>
             </a:r>
           </a:p>
           <a:p>
             <a:pPr lvl="2"/>
             <a:r>
-              <a:rPr lang="en-US" smtClean="0"/>
+              <a:rPr lang="en-US"/>
               <a:t>Third level</a:t>
             </a:r>
           </a:p>
           <a:p>
             <a:pPr lvl="3"/>
             <a:r>
-              <a:rPr lang="en-US" smtClean="0"/>
+              <a:rPr lang="en-US"/>
               <a:t>Fourth level</a:t>
             </a:r>
           </a:p>
           <a:p>
             <a:pPr lvl="4"/>
             <a:r>
-              <a:rPr lang="en-US" smtClean="0"/>
+              <a:rPr lang="en-US"/>
               <a:t>Fifth level</a:t>
             </a:r>
-            <a:endParaRPr lang="en-US"/>
           </a:p>
         </p:txBody>
       </p:sp>
@@ -2241,7 +2239,7 @@
           <a:p>
             <a:pPr lvl="0"/>
             <a:r>
-              <a:rPr lang="en-US" smtClean="0"/>
+              <a:rPr lang="en-US"/>
               <a:t>Click to edit Master text styles</a:t>
             </a:r>
           </a:p>
@@ -2264,7 +2262,7 @@
           <a:p>
             <a:fld id="{5BCAD085-E8A6-8845-BD4E-CB4CCA059FC4}" type="datetimeFigureOut">
               <a:rPr lang="en-US" smtClean="0"/>
-              <a:t>1/27/13</a:t>
+              <a:t>6/16/2026</a:t>
             </a:fld>
             <a:endParaRPr lang="en-US"/>
           </a:p>
@@ -2367,10 +2365,9 @@
           </a:lstStyle>
           <a:p>
             <a:r>
-              <a:rPr lang="en-US" smtClean="0"/>
+              <a:rPr lang="en-US"/>
               <a:t>Click to edit Master title style</a:t>
             </a:r>
-            <a:endParaRPr lang="en-US"/>
           </a:p>
         </p:txBody>
       </p:sp>
@@ -2494,7 +2491,7 @@
           <a:p>
             <a:pPr lvl="0"/>
             <a:r>
-              <a:rPr lang="en-US" smtClean="0"/>
+              <a:rPr lang="en-US"/>
               <a:t>Click to edit Master text styles</a:t>
             </a:r>
           </a:p>
@@ -2517,7 +2514,7 @@
           <a:p>
             <a:fld id="{5BCAD085-E8A6-8845-BD4E-CB4CCA059FC4}" type="datetimeFigureOut">
               <a:rPr lang="en-US" smtClean="0"/>
-              <a:t>1/27/13</a:t>
+              <a:t>6/16/2026</a:t>
             </a:fld>
             <a:endParaRPr lang="en-US"/>
           </a:p>
@@ -2626,10 +2623,9 @@
           <a:lstStyle/>
           <a:p>
             <a:r>
-              <a:rPr lang="en-US" smtClean="0"/>
+              <a:rPr lang="en-US"/>
               <a:t>Click to edit Master title style</a:t>
             </a:r>
-            <a:endParaRPr lang="en-US"/>
           </a:p>
         </p:txBody>
       </p:sp>
@@ -2660,38 +2656,37 @@
           <a:p>
             <a:pPr lvl="0"/>
             <a:r>
-              <a:rPr lang="en-US" smtClean="0"/>
+              <a:rPr lang="en-US"/>
               <a:t>Click to edit Master text styles</a:t>
             </a:r>
           </a:p>
           <a:p>
             <a:pPr lvl="1"/>
             <a:r>
-              <a:rPr lang="en-US" smtClean="0"/>
+              <a:rPr lang="en-US"/>
               <a:t>Second level</a:t>
             </a:r>
           </a:p>
           <a:p>
             <a:pPr lvl="2"/>
             <a:r>
-              <a:rPr lang="en-US" smtClean="0"/>
+              <a:rPr lang="en-US"/>
               <a:t>Third level</a:t>
             </a:r>
           </a:p>
           <a:p>
             <a:pPr lvl="3"/>
             <a:r>
-              <a:rPr lang="en-US" smtClean="0"/>
+              <a:rPr lang="en-US"/>
               <a:t>Fourth level</a:t>
             </a:r>
           </a:p>
           <a:p>
             <a:pPr lvl="4"/>
             <a:r>
-              <a:rPr lang="en-US" smtClean="0"/>
+              <a:rPr lang="en-US"/>
               <a:t>Fifth level</a:t>
             </a:r>
-            <a:endParaRPr lang="en-US"/>
           </a:p>
         </p:txBody>
       </p:sp>
@@ -2730,7 +2725,7 @@
           <a:p>
             <a:fld id="{5BCAD085-E8A6-8845-BD4E-CB4CCA059FC4}" type="datetimeFigureOut">
               <a:rPr lang="en-US" smtClean="0"/>
-              <a:t>1/27/13</a:t>
+              <a:t>6/16/2026</a:t>
             </a:fld>
             <a:endParaRPr lang="en-US"/>
           </a:p>
@@ -3089,7 +3084,7 @@
 </file>
 
 <file path=ppt/slides/slide1.xml><?xml version="1.0" encoding="utf-8"?>
-<p:sld xmlns:a="http://schemas.openxmlformats.org/drawingml/2006/main" xmlns:p="http://schemas.openxmlformats.org/presentationml/2006/main" xmlns:r="http://schemas.openxmlformats.org/officeDocument/2006/relationships">
+<p:sld xmlns:a="http://schemas.openxmlformats.org/drawingml/2006/main" xmlns:r="http://schemas.openxmlformats.org/officeDocument/2006/relationships" xmlns:p="http://schemas.openxmlformats.org/presentationml/2006/main">
   <p:cSld>
     <p:spTree>
       <p:nvGrpSpPr>
@@ -3097,7 +3092,14 @@
         <p:cNvGrpSpPr/>
         <p:nvPr/>
       </p:nvGrpSpPr>
-      <p:grpSpPr/>
+      <p:grpSpPr>
+        <a:xfrm>
+          <a:off x="0" y="0"/>
+          <a:ext cx="0" cy="0"/>
+          <a:chOff x="0" y="0"/>
+          <a:chExt cx="0" cy="0"/>
+        </a:xfrm>
+      </p:grpSpPr>
       <p:sp>
         <p:nvSpPr>
           <p:cNvPr id="2" name="Rectangle 1"/>
@@ -3138,6 +3140,7 @@
           <a:lstStyle/>
           <a:p>
             <a:pPr algn="ctr"/>
+            <a:endParaRPr/>
           </a:p>
         </p:txBody>
       </p:sp>
@@ -3181,6 +3184,7 @@
           <a:lstStyle/>
           <a:p>
             <a:pPr algn="ctr"/>
+            <a:endParaRPr/>
           </a:p>
         </p:txBody>
       </p:sp>
@@ -3356,6 +3360,7 @@
           <a:lstStyle/>
           <a:p>
             <a:pPr algn="ctr"/>
+            <a:endParaRPr/>
           </a:p>
         </p:txBody>
       </p:sp>
@@ -3465,6 +3470,7 @@
           <a:lstStyle/>
           <a:p>
             <a:pPr algn="ctr"/>
+            <a:endParaRPr/>
           </a:p>
         </p:txBody>
       </p:sp>
@@ -3574,6 +3580,7 @@
           <a:lstStyle/>
           <a:p>
             <a:pPr algn="ctr"/>
+            <a:endParaRPr/>
           </a:p>
         </p:txBody>
       </p:sp>
@@ -3652,7 +3659,7 @@
 </file>
 
 <file path=ppt/slides/slide10.xml><?xml version="1.0" encoding="utf-8"?>
-<p:sld xmlns:a="http://schemas.openxmlformats.org/drawingml/2006/main" xmlns:p="http://schemas.openxmlformats.org/presentationml/2006/main" xmlns:r="http://schemas.openxmlformats.org/officeDocument/2006/relationships">
+<p:sld xmlns:a="http://schemas.openxmlformats.org/drawingml/2006/main" xmlns:r="http://schemas.openxmlformats.org/officeDocument/2006/relationships" xmlns:p="http://schemas.openxmlformats.org/presentationml/2006/main">
   <p:cSld>
     <p:spTree>
       <p:nvGrpSpPr>
@@ -3660,7 +3667,14 @@
         <p:cNvGrpSpPr/>
         <p:nvPr/>
       </p:nvGrpSpPr>
-      <p:grpSpPr/>
+      <p:grpSpPr>
+        <a:xfrm>
+          <a:off x="0" y="0"/>
+          <a:ext cx="0" cy="0"/>
+          <a:chOff x="0" y="0"/>
+          <a:chExt cx="0" cy="0"/>
+        </a:xfrm>
+      </p:grpSpPr>
       <p:sp>
         <p:nvSpPr>
           <p:cNvPr id="2" name="Rectangle 1"/>
@@ -3701,6 +3715,7 @@
           <a:lstStyle/>
           <a:p>
             <a:pPr algn="ctr"/>
+            <a:endParaRPr/>
           </a:p>
         </p:txBody>
       </p:sp>
@@ -3810,6 +3825,7 @@
           <a:lstStyle/>
           <a:p>
             <a:pPr algn="ctr"/>
+            <a:endParaRPr/>
           </a:p>
         </p:txBody>
       </p:sp>
@@ -3919,6 +3935,7 @@
           <a:lstStyle/>
           <a:p>
             <a:pPr algn="ctr"/>
+            <a:endParaRPr/>
           </a:p>
         </p:txBody>
       </p:sp>
@@ -4028,6 +4045,7 @@
           <a:lstStyle/>
           <a:p>
             <a:pPr algn="ctr"/>
+            <a:endParaRPr/>
           </a:p>
         </p:txBody>
       </p:sp>
@@ -4257,6 +4275,7 @@
           <a:lstStyle/>
           <a:p>
             <a:pPr algn="ctr"/>
+            <a:endParaRPr/>
           </a:p>
         </p:txBody>
       </p:sp>
@@ -4335,7 +4354,7 @@
 </file>
 
 <file path=ppt/slides/slide11.xml><?xml version="1.0" encoding="utf-8"?>
-<p:sld xmlns:a="http://schemas.openxmlformats.org/drawingml/2006/main" xmlns:p="http://schemas.openxmlformats.org/presentationml/2006/main" xmlns:r="http://schemas.openxmlformats.org/officeDocument/2006/relationships">
+<p:sld xmlns:a="http://schemas.openxmlformats.org/drawingml/2006/main" xmlns:r="http://schemas.openxmlformats.org/officeDocument/2006/relationships" xmlns:p="http://schemas.openxmlformats.org/presentationml/2006/main">
   <p:cSld>
     <p:spTree>
       <p:nvGrpSpPr>
@@ -4343,7 +4362,14 @@
         <p:cNvGrpSpPr/>
         <p:nvPr/>
       </p:nvGrpSpPr>
-      <p:grpSpPr/>
+      <p:grpSpPr>
+        <a:xfrm>
+          <a:off x="0" y="0"/>
+          <a:ext cx="0" cy="0"/>
+          <a:chOff x="0" y="0"/>
+          <a:chExt cx="0" cy="0"/>
+        </a:xfrm>
+      </p:grpSpPr>
       <p:sp>
         <p:nvSpPr>
           <p:cNvPr id="2" name="Rectangle 1"/>
@@ -4384,6 +4410,7 @@
           <a:lstStyle/>
           <a:p>
             <a:pPr algn="ctr"/>
+            <a:endParaRPr/>
           </a:p>
         </p:txBody>
       </p:sp>
@@ -4462,7 +4489,7 @@
         <p:spPr>
           <a:xfrm>
             <a:off x="365760" y="1188720"/>
-            <a:ext cx="5760720" cy="4114800"/>
+            <a:ext cx="5760720" cy="2174954"/>
           </a:xfrm>
           <a:prstGeom prst="rect">
             <a:avLst/>
@@ -4481,13 +4508,31 @@
               </a:spcBef>
             </a:pPr>
             <a:r>
-              <a:rPr sz="1400">
-                <a:solidFill>
-                  <a:srgbClr val="222222"/>
-                </a:solidFill>
-                <a:latin typeface="맑은 고딕"/>
-              </a:rPr>
-              <a:t>✔ IOCP 서버 (Worker + Timer thread)</a:t>
+              <a:rPr sz="1400" dirty="0">
+                <a:solidFill>
+                  <a:srgbClr val="222222"/>
+                </a:solidFill>
+                <a:latin typeface="맑은 고딕"/>
+              </a:rPr>
+              <a:t>✔ IOCP </a:t>
+            </a:r>
+            <a:r>
+              <a:rPr sz="1400" dirty="0" err="1">
+                <a:solidFill>
+                  <a:srgbClr val="222222"/>
+                </a:solidFill>
+                <a:latin typeface="맑은 고딕"/>
+              </a:rPr>
+              <a:t>서버</a:t>
+            </a:r>
+            <a:r>
+              <a:rPr sz="1400" dirty="0">
+                <a:solidFill>
+                  <a:srgbClr val="222222"/>
+                </a:solidFill>
+                <a:latin typeface="맑은 고딕"/>
+              </a:rPr>
+              <a:t> (Worker + Timer thread)</a:t>
             </a:r>
           </a:p>
           <a:p>
@@ -4497,14 +4542,83 @@
               </a:spcBef>
             </a:pPr>
             <a:r>
-              <a:rPr sz="1400">
-                <a:solidFill>
-                  <a:srgbClr val="222222"/>
-                </a:solidFill>
-                <a:latin typeface="맑은 고딕"/>
-              </a:rPr>
-              <a:t>✔ 플레이어 로그인 / 이동 / 채팅</a:t>
-            </a:r>
+              <a:rPr sz="1400" dirty="0">
+                <a:solidFill>
+                  <a:srgbClr val="222222"/>
+                </a:solidFill>
+                <a:latin typeface="맑은 고딕"/>
+              </a:rPr>
+              <a:t>✔ </a:t>
+            </a:r>
+            <a:r>
+              <a:rPr sz="1400" dirty="0" err="1">
+                <a:solidFill>
+                  <a:srgbClr val="222222"/>
+                </a:solidFill>
+                <a:latin typeface="맑은 고딕"/>
+              </a:rPr>
+              <a:t>플레이어</a:t>
+            </a:r>
+            <a:r>
+              <a:rPr sz="1400" dirty="0">
+                <a:solidFill>
+                  <a:srgbClr val="222222"/>
+                </a:solidFill>
+                <a:latin typeface="맑은 고딕"/>
+              </a:rPr>
+              <a:t> </a:t>
+            </a:r>
+            <a:r>
+              <a:rPr sz="1400" dirty="0" err="1">
+                <a:solidFill>
+                  <a:srgbClr val="222222"/>
+                </a:solidFill>
+                <a:latin typeface="맑은 고딕"/>
+              </a:rPr>
+              <a:t>로그인</a:t>
+            </a:r>
+            <a:r>
+              <a:rPr sz="1400" dirty="0">
+                <a:solidFill>
+                  <a:srgbClr val="222222"/>
+                </a:solidFill>
+                <a:latin typeface="맑은 고딕"/>
+              </a:rPr>
+              <a:t> / </a:t>
+            </a:r>
+            <a:r>
+              <a:rPr sz="1400" dirty="0" err="1">
+                <a:solidFill>
+                  <a:srgbClr val="222222"/>
+                </a:solidFill>
+                <a:latin typeface="맑은 고딕"/>
+              </a:rPr>
+              <a:t>이동</a:t>
+            </a:r>
+            <a:r>
+              <a:rPr sz="1400" dirty="0">
+                <a:solidFill>
+                  <a:srgbClr val="222222"/>
+                </a:solidFill>
+                <a:latin typeface="맑은 고딕"/>
+              </a:rPr>
+              <a:t> / </a:t>
+            </a:r>
+            <a:r>
+              <a:rPr sz="1400" dirty="0" err="1">
+                <a:solidFill>
+                  <a:srgbClr val="222222"/>
+                </a:solidFill>
+                <a:latin typeface="맑은 고딕"/>
+              </a:rPr>
+              <a:t>채팅</a:t>
+            </a:r>
+            <a:endParaRPr sz="1400" dirty="0">
+              <a:solidFill>
+                <a:srgbClr val="222222"/>
+              </a:solidFill>
+              <a:latin typeface="맑은 고딕"/>
+            </a:endParaRPr>
           </a:p>
           <a:p>
             <a:pPr>
@@ -4513,14 +4627,47 @@
               </a:spcBef>
             </a:pPr>
             <a:r>
-              <a:rPr sz="1400">
-                <a:solidFill>
-                  <a:srgbClr val="222222"/>
-                </a:solidFill>
-                <a:latin typeface="맑은 고딕"/>
-              </a:rPr>
-              <a:t>✔ 섹터 기반 시야 관리</a:t>
-            </a:r>
+              <a:rPr sz="1400" dirty="0">
+                <a:solidFill>
+                  <a:srgbClr val="222222"/>
+                </a:solidFill>
+                <a:latin typeface="맑은 고딕"/>
+              </a:rPr>
+              <a:t>✔ </a:t>
+            </a:r>
+            <a:r>
+              <a:rPr sz="1400" dirty="0" err="1">
+                <a:solidFill>
+                  <a:srgbClr val="222222"/>
+                </a:solidFill>
+                <a:latin typeface="맑은 고딕"/>
+              </a:rPr>
+              <a:t>시야</a:t>
+            </a:r>
+            <a:r>
+              <a:rPr sz="1400" dirty="0">
+                <a:solidFill>
+                  <a:srgbClr val="222222"/>
+                </a:solidFill>
+                <a:latin typeface="맑은 고딕"/>
+              </a:rPr>
+              <a:t> </a:t>
+            </a:r>
+            <a:r>
+              <a:rPr sz="1400" dirty="0" err="1">
+                <a:solidFill>
+                  <a:srgbClr val="222222"/>
+                </a:solidFill>
+                <a:latin typeface="맑은 고딕"/>
+              </a:rPr>
+              <a:t>관리</a:t>
+            </a:r>
+            <a:endParaRPr sz="1400" dirty="0">
+              <a:solidFill>
+                <a:srgbClr val="222222"/>
+              </a:solidFill>
+              <a:latin typeface="맑은 고딕"/>
+            </a:endParaRPr>
           </a:p>
           <a:p>
             <a:pPr>
@@ -4529,13 +4676,49 @@
               </a:spcBef>
             </a:pPr>
             <a:r>
-              <a:rPr sz="1400">
-                <a:solidFill>
-                  <a:srgbClr val="222222"/>
-                </a:solidFill>
-                <a:latin typeface="맑은 고딕"/>
-              </a:rPr>
-              <a:t>✔ NPC 20만 마리 (Peace / Agro / Boss)</a:t>
+              <a:rPr sz="1400" dirty="0">
+                <a:solidFill>
+                  <a:srgbClr val="222222"/>
+                </a:solidFill>
+                <a:latin typeface="맑은 고딕"/>
+              </a:rPr>
+              <a:t>✔ NPC 20만 </a:t>
+            </a:r>
+            <a:r>
+              <a:rPr sz="1400" dirty="0" err="1">
+                <a:solidFill>
+                  <a:srgbClr val="222222"/>
+                </a:solidFill>
+                <a:latin typeface="맑은 고딕"/>
+              </a:rPr>
+              <a:t>마리</a:t>
+            </a:r>
+            <a:r>
+              <a:rPr sz="1400" dirty="0">
+                <a:solidFill>
+                  <a:srgbClr val="222222"/>
+                </a:solidFill>
+                <a:latin typeface="맑은 고딕"/>
+              </a:rPr>
+              <a:t> (Peace / </a:t>
+            </a:r>
+            <a:r>
+              <a:rPr sz="1400" dirty="0" err="1">
+                <a:solidFill>
+                  <a:srgbClr val="222222"/>
+                </a:solidFill>
+                <a:latin typeface="맑은 고딕"/>
+              </a:rPr>
+              <a:t>Agro</a:t>
+            </a:r>
+            <a:r>
+              <a:rPr sz="1400" dirty="0">
+                <a:solidFill>
+                  <a:srgbClr val="222222"/>
+                </a:solidFill>
+                <a:latin typeface="맑은 고딕"/>
+              </a:rPr>
+              <a:t> / Boss)</a:t>
             </a:r>
           </a:p>
           <a:p>
@@ -4545,14 +4728,47 @@
               </a:spcBef>
             </a:pPr>
             <a:r>
-              <a:rPr sz="1400">
-                <a:solidFill>
-                  <a:srgbClr val="222222"/>
-                </a:solidFill>
-                <a:latin typeface="맑은 고딕"/>
-              </a:rPr>
-              <a:t>✔ AI 상태머신 + A* 길찾기</a:t>
-            </a:r>
+              <a:rPr sz="1400" dirty="0">
+                <a:solidFill>
+                  <a:srgbClr val="222222"/>
+                </a:solidFill>
+                <a:latin typeface="맑은 고딕"/>
+              </a:rPr>
+              <a:t>✔ AI </a:t>
+            </a:r>
+            <a:r>
+              <a:rPr sz="1400" dirty="0" err="1">
+                <a:solidFill>
+                  <a:srgbClr val="222222"/>
+                </a:solidFill>
+                <a:latin typeface="맑은 고딕"/>
+              </a:rPr>
+              <a:t>상태머신</a:t>
+            </a:r>
+            <a:r>
+              <a:rPr sz="1400" dirty="0">
+                <a:solidFill>
+                  <a:srgbClr val="222222"/>
+                </a:solidFill>
+                <a:latin typeface="맑은 고딕"/>
+              </a:rPr>
+              <a:t> + A* </a:t>
+            </a:r>
+            <a:r>
+              <a:rPr sz="1400" dirty="0" err="1">
+                <a:solidFill>
+                  <a:srgbClr val="222222"/>
+                </a:solidFill>
+                <a:latin typeface="맑은 고딕"/>
+              </a:rPr>
+              <a:t>길찾기</a:t>
+            </a:r>
+            <a:endParaRPr sz="1400" dirty="0">
+              <a:solidFill>
+                <a:srgbClr val="222222"/>
+              </a:solidFill>
+              <a:latin typeface="맑은 고딕"/>
+            </a:endParaRPr>
           </a:p>
           <a:p>
             <a:pPr>
@@ -4561,14 +4777,47 @@
               </a:spcBef>
             </a:pPr>
             <a:r>
-              <a:rPr sz="1400">
-                <a:solidFill>
-                  <a:srgbClr val="222222"/>
-                </a:solidFill>
-                <a:latin typeface="맑은 고딕"/>
-              </a:rPr>
-              <a:t>✔ 보스 3페이즈 패턴</a:t>
-            </a:r>
+              <a:rPr sz="1400" dirty="0">
+                <a:solidFill>
+                  <a:srgbClr val="222222"/>
+                </a:solidFill>
+                <a:latin typeface="맑은 고딕"/>
+              </a:rPr>
+              <a:t>✔ </a:t>
+            </a:r>
+            <a:r>
+              <a:rPr sz="1400" dirty="0" err="1">
+                <a:solidFill>
+                  <a:srgbClr val="222222"/>
+                </a:solidFill>
+                <a:latin typeface="맑은 고딕"/>
+              </a:rPr>
+              <a:t>보스</a:t>
+            </a:r>
+            <a:r>
+              <a:rPr sz="1400" dirty="0">
+                <a:solidFill>
+                  <a:srgbClr val="222222"/>
+                </a:solidFill>
+                <a:latin typeface="맑은 고딕"/>
+              </a:rPr>
+              <a:t> 3페이즈 </a:t>
+            </a:r>
+            <a:r>
+              <a:rPr sz="1400" dirty="0" err="1">
+                <a:solidFill>
+                  <a:srgbClr val="222222"/>
+                </a:solidFill>
+                <a:latin typeface="맑은 고딕"/>
+              </a:rPr>
+              <a:t>패턴</a:t>
+            </a:r>
+            <a:endParaRPr sz="1400" dirty="0">
+              <a:solidFill>
+                <a:srgbClr val="222222"/>
+              </a:solidFill>
+              <a:latin typeface="맑은 고딕"/>
+            </a:endParaRPr>
           </a:p>
           <a:p>
             <a:pPr>
@@ -4577,13 +4826,139 @@
               </a:spcBef>
             </a:pPr>
             <a:r>
-              <a:rPr sz="1400">
-                <a:solidFill>
-                  <a:srgbClr val="222222"/>
-                </a:solidFill>
-                <a:latin typeface="맑은 고딕"/>
-              </a:rPr>
-              <a:t>✔ HP 회복 / 사망 / 부활 처리</a:t>
+              <a:rPr sz="1400" dirty="0">
+                <a:solidFill>
+                  <a:srgbClr val="222222"/>
+                </a:solidFill>
+                <a:latin typeface="맑은 고딕"/>
+              </a:rPr>
+              <a:t>✔ HP </a:t>
+            </a:r>
+            <a:r>
+              <a:rPr sz="1400" dirty="0" err="1">
+                <a:solidFill>
+                  <a:srgbClr val="222222"/>
+                </a:solidFill>
+                <a:latin typeface="맑은 고딕"/>
+              </a:rPr>
+              <a:t>회복</a:t>
+            </a:r>
+            <a:r>
+              <a:rPr sz="1400" dirty="0">
+                <a:solidFill>
+                  <a:srgbClr val="222222"/>
+                </a:solidFill>
+                <a:latin typeface="맑은 고딕"/>
+              </a:rPr>
+              <a:t> / </a:t>
+            </a:r>
+            <a:r>
+              <a:rPr sz="1400" dirty="0" err="1">
+                <a:solidFill>
+                  <a:srgbClr val="222222"/>
+                </a:solidFill>
+                <a:latin typeface="맑은 고딕"/>
+              </a:rPr>
+              <a:t>사망</a:t>
+            </a:r>
+            <a:r>
+              <a:rPr sz="1400" dirty="0">
+                <a:solidFill>
+                  <a:srgbClr val="222222"/>
+                </a:solidFill>
+                <a:latin typeface="맑은 고딕"/>
+              </a:rPr>
+              <a:t> / </a:t>
+            </a:r>
+            <a:r>
+              <a:rPr sz="1400" dirty="0" err="1">
+                <a:solidFill>
+                  <a:srgbClr val="222222"/>
+                </a:solidFill>
+                <a:latin typeface="맑은 고딕"/>
+              </a:rPr>
+              <a:t>부활</a:t>
+            </a:r>
+            <a:r>
+              <a:rPr sz="1400" dirty="0">
+                <a:solidFill>
+                  <a:srgbClr val="222222"/>
+                </a:solidFill>
+                <a:latin typeface="맑은 고딕"/>
+              </a:rPr>
+              <a:t> </a:t>
+            </a:r>
+            <a:r>
+              <a:rPr sz="1400" dirty="0" err="1">
+                <a:solidFill>
+                  <a:srgbClr val="222222"/>
+                </a:solidFill>
+                <a:latin typeface="맑은 고딕"/>
+              </a:rPr>
+              <a:t>처리</a:t>
+            </a:r>
+            <a:r>
+              <a:rPr sz="1400" dirty="0">
+                <a:solidFill>
+                  <a:srgbClr val="222222"/>
+                </a:solidFill>
+                <a:latin typeface="맑은 고딕"/>
+              </a:rPr>
+              <a:t> (</a:t>
+            </a:r>
+            <a:r>
+              <a:rPr sz="1400" dirty="0" err="1">
+                <a:solidFill>
+                  <a:srgbClr val="222222"/>
+                </a:solidFill>
+                <a:latin typeface="맑은 고딕"/>
+              </a:rPr>
+              <a:t>즉시</a:t>
+            </a:r>
+            <a:r>
+              <a:rPr sz="1400" dirty="0">
+                <a:solidFill>
+                  <a:srgbClr val="222222"/>
+                </a:solidFill>
+                <a:latin typeface="맑은 고딕"/>
+              </a:rPr>
+              <a:t> </a:t>
+            </a:r>
+            <a:r>
+              <a:rPr sz="1400" dirty="0" err="1">
+                <a:solidFill>
+                  <a:srgbClr val="222222"/>
+                </a:solidFill>
+                <a:latin typeface="맑은 고딕"/>
+              </a:rPr>
+              <a:t>알림</a:t>
+            </a:r>
+            <a:r>
+              <a:rPr sz="1400" dirty="0">
+                <a:solidFill>
+                  <a:srgbClr val="222222"/>
+                </a:solidFill>
+                <a:latin typeface="맑은 고딕"/>
+              </a:rPr>
+              <a:t> </a:t>
+            </a:r>
+            <a:r>
+              <a:rPr sz="1400" dirty="0" err="1">
+                <a:solidFill>
+                  <a:srgbClr val="222222"/>
+                </a:solidFill>
+                <a:latin typeface="맑은 고딕"/>
+              </a:rPr>
+              <a:t>수정</a:t>
+            </a:r>
+            <a:r>
+              <a:rPr sz="1400" dirty="0">
+                <a:solidFill>
+                  <a:srgbClr val="222222"/>
+                </a:solidFill>
+                <a:latin typeface="맑은 고딕"/>
+              </a:rPr>
+              <a:t>)</a:t>
             </a:r>
           </a:p>
           <a:p>
@@ -4593,14 +4968,83 @@
               </a:spcBef>
             </a:pPr>
             <a:r>
-              <a:rPr sz="1400">
-                <a:solidFill>
-                  <a:srgbClr val="222222"/>
-                </a:solidFill>
-                <a:latin typeface="맑은 고딕"/>
-              </a:rPr>
-              <a:t>✔ 경험치 / 레벨업 / 스탯 스케일링</a:t>
-            </a:r>
+              <a:rPr sz="1400" dirty="0">
+                <a:solidFill>
+                  <a:srgbClr val="222222"/>
+                </a:solidFill>
+                <a:latin typeface="맑은 고딕"/>
+              </a:rPr>
+              <a:t>✔ </a:t>
+            </a:r>
+            <a:r>
+              <a:rPr sz="1400" dirty="0" err="1">
+                <a:solidFill>
+                  <a:srgbClr val="222222"/>
+                </a:solidFill>
+                <a:latin typeface="맑은 고딕"/>
+              </a:rPr>
+              <a:t>경험치</a:t>
+            </a:r>
+            <a:r>
+              <a:rPr sz="1400" dirty="0">
+                <a:solidFill>
+                  <a:srgbClr val="222222"/>
+                </a:solidFill>
+                <a:latin typeface="맑은 고딕"/>
+              </a:rPr>
+              <a:t> / </a:t>
+            </a:r>
+            <a:r>
+              <a:rPr sz="1400" dirty="0" err="1">
+                <a:solidFill>
+                  <a:srgbClr val="222222"/>
+                </a:solidFill>
+                <a:latin typeface="맑은 고딕"/>
+              </a:rPr>
+              <a:t>레벨업</a:t>
+            </a:r>
+            <a:r>
+              <a:rPr sz="1400" dirty="0">
+                <a:solidFill>
+                  <a:srgbClr val="222222"/>
+                </a:solidFill>
+                <a:latin typeface="맑은 고딕"/>
+              </a:rPr>
+              <a:t> / </a:t>
+            </a:r>
+            <a:r>
+              <a:rPr sz="1400" dirty="0" err="1">
+                <a:solidFill>
+                  <a:srgbClr val="222222"/>
+                </a:solidFill>
+                <a:latin typeface="맑은 고딕"/>
+              </a:rPr>
+              <a:t>스탯</a:t>
+            </a:r>
+            <a:r>
+              <a:rPr sz="1400" dirty="0">
+                <a:solidFill>
+                  <a:srgbClr val="222222"/>
+                </a:solidFill>
+                <a:latin typeface="맑은 고딕"/>
+              </a:rPr>
+              <a:t> </a:t>
+            </a:r>
+            <a:r>
+              <a:rPr sz="1400" dirty="0" err="1">
+                <a:solidFill>
+                  <a:srgbClr val="222222"/>
+                </a:solidFill>
+                <a:latin typeface="맑은 고딕"/>
+              </a:rPr>
+              <a:t>스케일링</a:t>
+            </a:r>
+            <a:endParaRPr sz="1400" dirty="0">
+              <a:solidFill>
+                <a:srgbClr val="222222"/>
+              </a:solidFill>
+              <a:latin typeface="맑은 고딕"/>
+            </a:endParaRPr>
           </a:p>
         </p:txBody>
       </p:sp>
@@ -4670,7 +5114,7 @@
                 </a:solidFill>
                 <a:latin typeface="맑은 고딕"/>
               </a:rPr>
-              <a:t>✔ 퀘스트 2종 (킬카운트 + 보상)</a:t>
+              <a:t>✔ 퀘스트 2종 (킬카운트 + 보상, Q키 패널)</a:t>
             </a:r>
           </a:p>
           <a:p>
@@ -4686,7 +5130,7 @@
                 </a:solidFill>
                 <a:latin typeface="맑은 고딕"/>
               </a:rPr>
-              <a:t>✔ S키 3×3 광역 스킬</a:t>
+              <a:t>✔ A키 방향성 근접 + D키 원거리 (6타일)</a:t>
             </a:r>
           </a:p>
           <a:p>
@@ -4702,7 +5146,7 @@
                 </a:solidFill>
                 <a:latin typeface="맑은 고딕"/>
               </a:rPr>
-              <a:t>✔ Lua 스크립트 몬스터 배치</a:t>
+              <a:t>✔ S키 3×3 광역 스킬</a:t>
             </a:r>
           </a:p>
           <a:p>
@@ -4718,7 +5162,7 @@
                 </a:solidFill>
                 <a:latin typeface="맑은 고딕"/>
               </a:rPr>
-              <a:t>✔ 미니맵 (M키) · 퀘스트 패널 (Q키)</a:t>
+              <a:t>✔ Lua 스크립트: 성채 + 나무 + 물 장애물</a:t>
             </a:r>
           </a:p>
           <a:p>
@@ -4734,7 +5178,7 @@
                 </a:solidFill>
                 <a:latin typeface="맑은 고딕"/>
               </a:rPr>
-              <a:t>✔ Send Batching 최적화</a:t>
+              <a:t>✔ 미니맵 (M키) · Send Batching 최적화</a:t>
             </a:r>
           </a:p>
           <a:p>
@@ -4751,82 +5195,6 @@
                 <a:latin typeface="맑은 고딕"/>
               </a:rPr>
               <a:t>✔ 동시접속 5,000명 달성</a:t>
-            </a:r>
-          </a:p>
-        </p:txBody>
-      </p:sp>
-      <p:sp>
-        <p:nvSpPr>
-          <p:cNvPr id="7" name="Rectangle 6"/>
-          <p:cNvSpPr/>
-          <p:nvPr/>
-        </p:nvSpPr>
-        <p:spPr>
-          <a:xfrm>
-            <a:off x="365760" y="5669280"/>
-            <a:ext cx="11430000" cy="635000"/>
-          </a:xfrm>
-          <a:prstGeom prst="rect">
-            <a:avLst/>
-          </a:prstGeom>
-          <a:solidFill>
-            <a:srgbClr val="1B2A4A"/>
-          </a:solidFill>
-          <a:ln>
-            <a:noFill/>
-          </a:ln>
-        </p:spPr>
-        <p:style>
-          <a:lnRef idx="1">
-            <a:schemeClr val="accent1"/>
-          </a:lnRef>
-          <a:fillRef idx="3">
-            <a:schemeClr val="accent1"/>
-          </a:fillRef>
-          <a:effectRef idx="2">
-            <a:schemeClr val="accent1"/>
-          </a:effectRef>
-          <a:fontRef idx="minor">
-            <a:schemeClr val="lt1"/>
-          </a:fontRef>
-        </p:style>
-        <p:txBody>
-          <a:bodyPr rtlCol="0" anchor="ctr"/>
-          <a:lstStyle/>
-          <a:p>
-            <a:pPr algn="ctr"/>
-          </a:p>
-        </p:txBody>
-      </p:sp>
-      <p:sp>
-        <p:nvSpPr>
-          <p:cNvPr id="8" name="TextBox 7"/>
-          <p:cNvSpPr txBox="1"/>
-          <p:nvPr/>
-        </p:nvSpPr>
-        <p:spPr>
-          <a:xfrm>
-            <a:off x="365760" y="5715000"/>
-            <a:ext cx="11430000" cy="508000"/>
-          </a:xfrm>
-          <a:prstGeom prst="rect">
-            <a:avLst/>
-          </a:prstGeom>
-          <a:noFill/>
-        </p:spPr>
-        <p:txBody>
-          <a:bodyPr wrap="square"/>
-          <a:lstStyle/>
-          <a:p>
-            <a:pPr algn="ctr"/>
-            <a:r>
-              <a:rPr sz="2400" b="1" i="0">
-                <a:solidFill>
-                  <a:srgbClr val="FFFFFF"/>
-                </a:solidFill>
-                <a:latin typeface="맑은 고딕"/>
-              </a:rPr>
-              <a:t>Q &amp; A</a:t>
             </a:r>
           </a:p>
         </p:txBody>
@@ -4840,7 +5208,7 @@
 </file>
 
 <file path=ppt/slides/slide2.xml><?xml version="1.0" encoding="utf-8"?>
-<p:sld xmlns:a="http://schemas.openxmlformats.org/drawingml/2006/main" xmlns:p="http://schemas.openxmlformats.org/presentationml/2006/main" xmlns:r="http://schemas.openxmlformats.org/officeDocument/2006/relationships">
+<p:sld xmlns:a="http://schemas.openxmlformats.org/drawingml/2006/main" xmlns:r="http://schemas.openxmlformats.org/officeDocument/2006/relationships" xmlns:p="http://schemas.openxmlformats.org/presentationml/2006/main">
   <p:cSld>
     <p:spTree>
       <p:nvGrpSpPr>
@@ -4848,7 +5216,14 @@
         <p:cNvGrpSpPr/>
         <p:nvPr/>
       </p:nvGrpSpPr>
-      <p:grpSpPr/>
+      <p:grpSpPr>
+        <a:xfrm>
+          <a:off x="0" y="0"/>
+          <a:ext cx="0" cy="0"/>
+          <a:chOff x="0" y="0"/>
+          <a:chExt cx="0" cy="0"/>
+        </a:xfrm>
+      </p:grpSpPr>
       <p:sp>
         <p:nvSpPr>
           <p:cNvPr id="2" name="Rectangle 1"/>
@@ -4889,6 +5264,7 @@
           <a:lstStyle/>
           <a:p>
             <a:pPr algn="ctr"/>
+            <a:endParaRPr/>
           </a:p>
         </p:txBody>
       </p:sp>
@@ -4998,6 +5374,7 @@
           <a:lstStyle/>
           <a:p>
             <a:pPr algn="ctr"/>
+            <a:endParaRPr/>
           </a:p>
         </p:txBody>
       </p:sp>
@@ -5107,6 +5484,7 @@
           <a:lstStyle/>
           <a:p>
             <a:pPr algn="ctr"/>
+            <a:endParaRPr/>
           </a:p>
         </p:txBody>
       </p:sp>
@@ -5216,6 +5594,7 @@
           <a:lstStyle/>
           <a:p>
             <a:pPr algn="ctr"/>
+            <a:endParaRPr/>
           </a:p>
         </p:txBody>
       </p:sp>
@@ -5325,6 +5704,7 @@
           <a:lstStyle/>
           <a:p>
             <a:pPr algn="ctr"/>
+            <a:endParaRPr/>
           </a:p>
         </p:txBody>
       </p:sp>
@@ -5634,7 +6014,7 @@
 </file>
 
 <file path=ppt/slides/slide3.xml><?xml version="1.0" encoding="utf-8"?>
-<p:sld xmlns:a="http://schemas.openxmlformats.org/drawingml/2006/main" xmlns:p="http://schemas.openxmlformats.org/presentationml/2006/main" xmlns:r="http://schemas.openxmlformats.org/officeDocument/2006/relationships">
+<p:sld xmlns:a="http://schemas.openxmlformats.org/drawingml/2006/main" xmlns:r="http://schemas.openxmlformats.org/officeDocument/2006/relationships" xmlns:p="http://schemas.openxmlformats.org/presentationml/2006/main">
   <p:cSld>
     <p:spTree>
       <p:nvGrpSpPr>
@@ -5642,7 +6022,14 @@
         <p:cNvGrpSpPr/>
         <p:nvPr/>
       </p:nvGrpSpPr>
-      <p:grpSpPr/>
+      <p:grpSpPr>
+        <a:xfrm>
+          <a:off x="0" y="0"/>
+          <a:ext cx="0" cy="0"/>
+          <a:chOff x="0" y="0"/>
+          <a:chExt cx="0" cy="0"/>
+        </a:xfrm>
+      </p:grpSpPr>
       <p:sp>
         <p:nvSpPr>
           <p:cNvPr id="2" name="Rectangle 1"/>
@@ -5683,6 +6070,7 @@
           <a:lstStyle/>
           <a:p>
             <a:pPr algn="ctr"/>
+            <a:endParaRPr/>
           </a:p>
         </p:txBody>
       </p:sp>
@@ -5850,7 +6238,23 @@
                 </a:solidFill>
                 <a:latin typeface="맑은 고딕"/>
               </a:rPr>
-              <a:t>· 성채 내부 기둥(pillar) 배치 → A* 경로 시각화</a:t>
+              <a:t>· 장애물 3종: 벽/바위(0), 나무(1), 물(2)</a:t>
+            </a:r>
+          </a:p>
+          <a:p>
+            <a:pPr>
+              <a:spcBef>
+                <a:spcPts val="400"/>
+              </a:spcBef>
+            </a:pPr>
+            <a:r>
+              <a:rPr sz="1500">
+                <a:solidFill>
+                  <a:srgbClr val="222222"/>
+                </a:solidFill>
+                <a:latin typeface="맑은 고딕"/>
+              </a:rPr>
+              <a:t>· 나무 클러스터 27개 + 수역 약 20개 (월드 전역 분산)</a:t>
             </a:r>
           </a:p>
         </p:txBody>
@@ -5895,6 +6299,7 @@
           <a:lstStyle/>
           <a:p>
             <a:pPr algn="ctr"/>
+            <a:endParaRPr/>
           </a:p>
         </p:txBody>
       </p:sp>
@@ -6142,7 +6547,7 @@
 </file>
 
 <file path=ppt/slides/slide4.xml><?xml version="1.0" encoding="utf-8"?>
-<p:sld xmlns:a="http://schemas.openxmlformats.org/drawingml/2006/main" xmlns:p="http://schemas.openxmlformats.org/presentationml/2006/main" xmlns:r="http://schemas.openxmlformats.org/officeDocument/2006/relationships">
+<p:sld xmlns:a="http://schemas.openxmlformats.org/drawingml/2006/main" xmlns:r="http://schemas.openxmlformats.org/officeDocument/2006/relationships" xmlns:p="http://schemas.openxmlformats.org/presentationml/2006/main">
   <p:cSld>
     <p:spTree>
       <p:nvGrpSpPr>
@@ -6150,7 +6555,14 @@
         <p:cNvGrpSpPr/>
         <p:nvPr/>
       </p:nvGrpSpPr>
-      <p:grpSpPr/>
+      <p:grpSpPr>
+        <a:xfrm>
+          <a:off x="0" y="0"/>
+          <a:ext cx="0" cy="0"/>
+          <a:chOff x="0" y="0"/>
+          <a:chExt cx="0" cy="0"/>
+        </a:xfrm>
+      </p:grpSpPr>
       <p:sp>
         <p:nvSpPr>
           <p:cNvPr id="2" name="Rectangle 1"/>
@@ -6191,6 +6603,7 @@
           <a:lstStyle/>
           <a:p>
             <a:pPr algn="ctr"/>
+            <a:endParaRPr/>
           </a:p>
         </p:txBody>
       </p:sp>
@@ -6300,6 +6713,7 @@
           <a:lstStyle/>
           <a:p>
             <a:pPr algn="ctr"/>
+            <a:endParaRPr/>
           </a:p>
         </p:txBody>
       </p:sp>
@@ -6409,6 +6823,7 @@
           <a:lstStyle/>
           <a:p>
             <a:pPr algn="ctr"/>
+            <a:endParaRPr/>
           </a:p>
         </p:txBody>
       </p:sp>
@@ -6555,6 +6970,7 @@
           <a:lstStyle/>
           <a:p>
             <a:pPr algn="ctr"/>
+            <a:endParaRPr/>
           </a:p>
         </p:txBody>
       </p:sp>
@@ -6664,6 +7080,7 @@
           <a:lstStyle/>
           <a:p>
             <a:pPr algn="ctr"/>
+            <a:endParaRPr/>
           </a:p>
         </p:txBody>
       </p:sp>
@@ -6810,6 +7227,7 @@
           <a:lstStyle/>
           <a:p>
             <a:pPr algn="ctr"/>
+            <a:endParaRPr/>
           </a:p>
         </p:txBody>
       </p:sp>
@@ -6919,6 +7337,7 @@
           <a:lstStyle/>
           <a:p>
             <a:pPr algn="ctr"/>
+            <a:endParaRPr/>
           </a:p>
         </p:txBody>
       </p:sp>
@@ -7100,7 +7519,7 @@
 </file>
 
 <file path=ppt/slides/slide5.xml><?xml version="1.0" encoding="utf-8"?>
-<p:sld xmlns:a="http://schemas.openxmlformats.org/drawingml/2006/main" xmlns:p="http://schemas.openxmlformats.org/presentationml/2006/main" xmlns:r="http://schemas.openxmlformats.org/officeDocument/2006/relationships">
+<p:sld xmlns:a="http://schemas.openxmlformats.org/drawingml/2006/main" xmlns:r="http://schemas.openxmlformats.org/officeDocument/2006/relationships" xmlns:p="http://schemas.openxmlformats.org/presentationml/2006/main">
   <p:cSld>
     <p:spTree>
       <p:nvGrpSpPr>
@@ -7108,7 +7527,14 @@
         <p:cNvGrpSpPr/>
         <p:nvPr/>
       </p:nvGrpSpPr>
-      <p:grpSpPr/>
+      <p:grpSpPr>
+        <a:xfrm>
+          <a:off x="0" y="0"/>
+          <a:ext cx="0" cy="0"/>
+          <a:chOff x="0" y="0"/>
+          <a:chExt cx="0" cy="0"/>
+        </a:xfrm>
+      </p:grpSpPr>
       <p:sp>
         <p:nvSpPr>
           <p:cNvPr id="2" name="Rectangle 1"/>
@@ -7149,6 +7575,7 @@
           <a:lstStyle/>
           <a:p>
             <a:pPr algn="ctr"/>
+            <a:endParaRPr/>
           </a:p>
         </p:txBody>
       </p:sp>
@@ -7258,6 +7685,7 @@
           <a:lstStyle/>
           <a:p>
             <a:pPr algn="ctr"/>
+            <a:endParaRPr/>
           </a:p>
         </p:txBody>
       </p:sp>
@@ -7289,7 +7717,7 @@
                 </a:solidFill>
                 <a:latin typeface="맑은 고딕"/>
               </a:rPr>
-              <a:t>A키  — 4방향 공격</a:t>
+              <a:t>A키  — 방향성 근접</a:t>
             </a:r>
           </a:p>
         </p:txBody>
@@ -7367,6 +7795,7 @@
           <a:lstStyle/>
           <a:p>
             <a:pPr algn="ctr"/>
+            <a:endParaRPr/>
           </a:p>
         </p:txBody>
       </p:sp>
@@ -7398,8 +7827,9 @@
                 </a:solidFill>
                 <a:latin typeface="맑은 고딕"/>
               </a:rPr>
-              <a:t>상·하·좌·우 1칸 NPC 동시 피격
-데미지 = 15 + (레벨-1)×2</a:t>
+              <a:t>바라보는 방향 앞 1칸 NPC 피격
+데미지 = 15 + (레벨-1)×2
+D키: 직선 6타일 원거리 (쿨 2초)</a:t>
             </a:r>
           </a:p>
         </p:txBody>
@@ -7444,6 +7874,7 @@
           <a:lstStyle/>
           <a:p>
             <a:pPr algn="ctr"/>
+            <a:endParaRPr/>
           </a:p>
         </p:txBody>
       </p:sp>
@@ -7553,6 +7984,7 @@
           <a:lstStyle/>
           <a:p>
             <a:pPr algn="ctr"/>
+            <a:endParaRPr/>
           </a:p>
         </p:txBody>
       </p:sp>
@@ -7630,6 +8062,7 @@
           <a:lstStyle/>
           <a:p>
             <a:pPr algn="ctr"/>
+            <a:endParaRPr/>
           </a:p>
         </p:txBody>
       </p:sp>
@@ -7739,6 +8172,7 @@
           <a:lstStyle/>
           <a:p>
             <a:pPr algn="ctr"/>
+            <a:endParaRPr/>
           </a:p>
         </p:txBody>
       </p:sp>
@@ -7785,7 +8219,7 @@
         </p:nvSpPr>
         <p:spPr>
           <a:xfrm>
-            <a:off x="365760" y="4434840"/>
+            <a:off x="365760" y="4538785"/>
             <a:ext cx="11430000" cy="279400"/>
           </a:xfrm>
           <a:prstGeom prst="rect">
@@ -7799,14 +8233,56 @@
           <a:p>
             <a:pPr algn="l"/>
             <a:r>
-              <a:rPr sz="1400" b="1" i="0">
+              <a:rPr sz="1400" b="1" i="0" dirty="0" err="1">
                 <a:solidFill>
                   <a:srgbClr val="1B2A4A"/>
                 </a:solidFill>
                 <a:latin typeface="맑은 고딕"/>
               </a:rPr>
-              <a:t>레벨업 스탯 스케일링</a:t>
-            </a:r>
+              <a:t>레벨업</a:t>
+            </a:r>
+            <a:r>
+              <a:rPr sz="1400" b="1" i="0" dirty="0">
+                <a:solidFill>
+                  <a:srgbClr val="1B2A4A"/>
+                </a:solidFill>
+                <a:latin typeface="맑은 고딕"/>
+              </a:rPr>
+              <a:t> </a:t>
+            </a:r>
+            <a:r>
+              <a:rPr sz="1400" b="1" i="0" dirty="0" err="1">
+                <a:solidFill>
+                  <a:srgbClr val="1B2A4A"/>
+                </a:solidFill>
+                <a:latin typeface="맑은 고딕"/>
+              </a:rPr>
+              <a:t>스탯</a:t>
+            </a:r>
+            <a:r>
+              <a:rPr sz="1400" b="1" i="0" dirty="0">
+                <a:solidFill>
+                  <a:srgbClr val="1B2A4A"/>
+                </a:solidFill>
+                <a:latin typeface="맑은 고딕"/>
+              </a:rPr>
+              <a:t> </a:t>
+            </a:r>
+            <a:r>
+              <a:rPr sz="1400" b="1" i="0" dirty="0" err="1">
+                <a:solidFill>
+                  <a:srgbClr val="1B2A4A"/>
+                </a:solidFill>
+                <a:latin typeface="맑은 고딕"/>
+              </a:rPr>
+              <a:t>스케일링</a:t>
+            </a:r>
+            <a:endParaRPr sz="1400" b="1" i="0" dirty="0">
+              <a:solidFill>
+                <a:srgbClr val="1B2A4A"/>
+              </a:solidFill>
+              <a:latin typeface="맑은 고딕"/>
+            </a:endParaRPr>
           </a:p>
         </p:txBody>
       </p:sp>
@@ -7818,7 +8294,7 @@
         </p:nvSpPr>
         <p:spPr>
           <a:xfrm>
-            <a:off x="365760" y="4754880"/>
+            <a:off x="365760" y="4983480"/>
             <a:ext cx="11430000" cy="1371600"/>
           </a:xfrm>
           <a:prstGeom prst="rect">
@@ -7838,14 +8314,65 @@
               </a:spcBef>
             </a:pPr>
             <a:r>
-              <a:rPr sz="1400">
-                <a:solidFill>
-                  <a:srgbClr val="222222"/>
-                </a:solidFill>
-                <a:latin typeface="맑은 고딕"/>
-              </a:rPr>
-              <a:t>· max_hp  = 100 + (레벨-1)×10      레벨업 시 HP 전회복</a:t>
-            </a:r>
+              <a:rPr sz="1400" dirty="0">
+                <a:solidFill>
+                  <a:srgbClr val="222222"/>
+                </a:solidFill>
+                <a:latin typeface="맑은 고딕"/>
+              </a:rPr>
+              <a:t>· </a:t>
+            </a:r>
+            <a:r>
+              <a:rPr sz="1400" dirty="0" err="1">
+                <a:solidFill>
+                  <a:srgbClr val="222222"/>
+                </a:solidFill>
+                <a:latin typeface="맑은 고딕"/>
+              </a:rPr>
+              <a:t>max_hp</a:t>
+            </a:r>
+            <a:r>
+              <a:rPr sz="1400" dirty="0">
+                <a:solidFill>
+                  <a:srgbClr val="222222"/>
+                </a:solidFill>
+                <a:latin typeface="맑은 고딕"/>
+              </a:rPr>
+              <a:t>  = 100 + (레벨-1)×10      </a:t>
+            </a:r>
+            <a:r>
+              <a:rPr sz="1400" dirty="0" err="1">
+                <a:solidFill>
+                  <a:srgbClr val="222222"/>
+                </a:solidFill>
+                <a:latin typeface="맑은 고딕"/>
+              </a:rPr>
+              <a:t>레벨업</a:t>
+            </a:r>
+            <a:r>
+              <a:rPr sz="1400" dirty="0">
+                <a:solidFill>
+                  <a:srgbClr val="222222"/>
+                </a:solidFill>
+                <a:latin typeface="맑은 고딕"/>
+              </a:rPr>
+              <a:t> 시 HP </a:t>
+            </a:r>
+            <a:r>
+              <a:rPr sz="1400" dirty="0" err="1">
+                <a:solidFill>
+                  <a:srgbClr val="222222"/>
+                </a:solidFill>
+                <a:latin typeface="맑은 고딕"/>
+              </a:rPr>
+              <a:t>전회복</a:t>
+            </a:r>
+            <a:endParaRPr sz="1400" dirty="0">
+              <a:solidFill>
+                <a:srgbClr val="222222"/>
+              </a:solidFill>
+              <a:latin typeface="맑은 고딕"/>
+            </a:endParaRPr>
           </a:p>
           <a:p>
             <a:pPr>
@@ -7854,13 +8381,31 @@
               </a:spcBef>
             </a:pPr>
             <a:r>
-              <a:rPr sz="1400">
-                <a:solidFill>
-                  <a:srgbClr val="222222"/>
-                </a:solidFill>
-                <a:latin typeface="맑은 고딕"/>
-              </a:rPr>
-              <a:t>· 공격력  = 15  + (레벨-1)×2</a:t>
+              <a:rPr sz="1400" dirty="0">
+                <a:solidFill>
+                  <a:srgbClr val="222222"/>
+                </a:solidFill>
+                <a:latin typeface="맑은 고딕"/>
+              </a:rPr>
+              <a:t>· </a:t>
+            </a:r>
+            <a:r>
+              <a:rPr sz="1400" dirty="0" err="1">
+                <a:solidFill>
+                  <a:srgbClr val="222222"/>
+                </a:solidFill>
+                <a:latin typeface="맑은 고딕"/>
+              </a:rPr>
+              <a:t>공격력</a:t>
+            </a:r>
+            <a:r>
+              <a:rPr sz="1400" dirty="0">
+                <a:solidFill>
+                  <a:srgbClr val="222222"/>
+                </a:solidFill>
+                <a:latin typeface="맑은 고딕"/>
+              </a:rPr>
+              <a:t>  = 15  + (레벨-1)×2</a:t>
             </a:r>
           </a:p>
           <a:p>
@@ -7870,13 +8415,31 @@
               </a:spcBef>
             </a:pPr>
             <a:r>
-              <a:rPr sz="1400">
-                <a:solidFill>
-                  <a:srgbClr val="222222"/>
-                </a:solidFill>
-                <a:latin typeface="맑은 고딕"/>
-              </a:rPr>
-              <a:t>· 스킬    = 30  + (레벨-1)×3       EXP = 100 × 2^(레벨-1)</a:t>
+              <a:rPr sz="1400" dirty="0">
+                <a:solidFill>
+                  <a:srgbClr val="222222"/>
+                </a:solidFill>
+                <a:latin typeface="맑은 고딕"/>
+              </a:rPr>
+              <a:t>· </a:t>
+            </a:r>
+            <a:r>
+              <a:rPr sz="1400" dirty="0" err="1">
+                <a:solidFill>
+                  <a:srgbClr val="222222"/>
+                </a:solidFill>
+                <a:latin typeface="맑은 고딕"/>
+              </a:rPr>
+              <a:t>스킬</a:t>
+            </a:r>
+            <a:r>
+              <a:rPr sz="1400" dirty="0">
+                <a:solidFill>
+                  <a:srgbClr val="222222"/>
+                </a:solidFill>
+                <a:latin typeface="맑은 고딕"/>
+              </a:rPr>
+              <a:t>    = 30  + (레벨-1)×3       EXP = 100 × 2^(레벨-1)</a:t>
             </a:r>
           </a:p>
         </p:txBody>
@@ -7923,7 +8486,7 @@
 </file>
 
 <file path=ppt/slides/slide6.xml><?xml version="1.0" encoding="utf-8"?>
-<p:sld xmlns:a="http://schemas.openxmlformats.org/drawingml/2006/main" xmlns:p="http://schemas.openxmlformats.org/presentationml/2006/main" xmlns:r="http://schemas.openxmlformats.org/officeDocument/2006/relationships">
+<p:sld xmlns:a="http://schemas.openxmlformats.org/drawingml/2006/main" xmlns:r="http://schemas.openxmlformats.org/officeDocument/2006/relationships" xmlns:p="http://schemas.openxmlformats.org/presentationml/2006/main">
   <p:cSld>
     <p:spTree>
       <p:nvGrpSpPr>
@@ -7931,7 +8494,14 @@
         <p:cNvGrpSpPr/>
         <p:nvPr/>
       </p:nvGrpSpPr>
-      <p:grpSpPr/>
+      <p:grpSpPr>
+        <a:xfrm>
+          <a:off x="0" y="0"/>
+          <a:ext cx="0" cy="0"/>
+          <a:chOff x="0" y="0"/>
+          <a:chExt cx="0" cy="0"/>
+        </a:xfrm>
+      </p:grpSpPr>
       <p:sp>
         <p:nvSpPr>
           <p:cNvPr id="2" name="Rectangle 1"/>
@@ -7972,6 +8542,7 @@
           <a:lstStyle/>
           <a:p>
             <a:pPr algn="ctr"/>
+            <a:endParaRPr/>
           </a:p>
         </p:txBody>
       </p:sp>
@@ -8114,6 +8685,7 @@
           <a:lstStyle/>
           <a:p>
             <a:pPr algn="ctr"/>
+            <a:endParaRPr/>
           </a:p>
         </p:txBody>
       </p:sp>
@@ -8158,7 +8730,7 @@
         </p:nvSpPr>
         <p:spPr>
           <a:xfrm>
-            <a:off x="2560320" y="1617980"/>
+            <a:off x="1828800" y="1617980"/>
             <a:ext cx="3017520" cy="254000"/>
           </a:xfrm>
           <a:prstGeom prst="rect">
@@ -8172,7 +8744,7 @@
           <a:p>
             <a:pPr algn="l"/>
             <a:r>
-              <a:rPr sz="1200" b="0" i="0">
+              <a:rPr sz="1200" b="0" i="0" dirty="0">
                 <a:solidFill>
                   <a:srgbClr val="556575"/>
                 </a:solidFill>
@@ -8223,6 +8795,7 @@
           <a:lstStyle/>
           <a:p>
             <a:pPr algn="ctr"/>
+            <a:endParaRPr/>
           </a:p>
         </p:txBody>
       </p:sp>
@@ -8267,7 +8840,7 @@
         </p:nvSpPr>
         <p:spPr>
           <a:xfrm>
-            <a:off x="2560320" y="2024380"/>
+            <a:off x="1828800" y="2024380"/>
             <a:ext cx="3017520" cy="254000"/>
           </a:xfrm>
           <a:prstGeom prst="rect">
@@ -8332,6 +8905,7 @@
           <a:lstStyle/>
           <a:p>
             <a:pPr algn="ctr"/>
+            <a:endParaRPr/>
           </a:p>
         </p:txBody>
       </p:sp>
@@ -8376,7 +8950,7 @@
         </p:nvSpPr>
         <p:spPr>
           <a:xfrm>
-            <a:off x="2560320" y="2430780"/>
+            <a:off x="1828800" y="2430780"/>
             <a:ext cx="3017520" cy="254000"/>
           </a:xfrm>
           <a:prstGeom prst="rect">
@@ -8441,6 +9015,7 @@
           <a:lstStyle/>
           <a:p>
             <a:pPr algn="ctr"/>
+            <a:endParaRPr/>
           </a:p>
         </p:txBody>
       </p:sp>
@@ -8485,7 +9060,7 @@
         </p:nvSpPr>
         <p:spPr>
           <a:xfrm>
-            <a:off x="2560320" y="2837180"/>
+            <a:off x="1828800" y="2837180"/>
             <a:ext cx="3017520" cy="254000"/>
           </a:xfrm>
           <a:prstGeom prst="rect">
@@ -8550,6 +9125,7 @@
           <a:lstStyle/>
           <a:p>
             <a:pPr algn="ctr"/>
+            <a:endParaRPr/>
           </a:p>
         </p:txBody>
       </p:sp>
@@ -8594,7 +9170,7 @@
         </p:nvSpPr>
         <p:spPr>
           <a:xfrm>
-            <a:off x="2560320" y="3243580"/>
+            <a:off x="1828800" y="3243580"/>
             <a:ext cx="3017520" cy="254000"/>
           </a:xfrm>
           <a:prstGeom prst="rect">
@@ -8659,6 +9235,7 @@
           <a:lstStyle/>
           <a:p>
             <a:pPr algn="ctr"/>
+            <a:endParaRPr/>
           </a:p>
         </p:txBody>
       </p:sp>
@@ -8703,7 +9280,7 @@
         </p:nvSpPr>
         <p:spPr>
           <a:xfrm>
-            <a:off x="2560320" y="3649980"/>
+            <a:off x="1828800" y="3649980"/>
             <a:ext cx="3017520" cy="254000"/>
           </a:xfrm>
           <a:prstGeom prst="rect">
@@ -8834,6 +9411,7 @@
           <a:lstStyle/>
           <a:p>
             <a:pPr algn="ctr"/>
+            <a:endParaRPr/>
           </a:p>
         </p:txBody>
       </p:sp>
@@ -8976,6 +9554,7 @@
           <a:lstStyle/>
           <a:p>
             <a:pPr algn="ctr"/>
+            <a:endParaRPr/>
           </a:p>
         </p:txBody>
       </p:sp>
@@ -9153,7 +9732,7 @@
 </file>
 
 <file path=ppt/slides/slide7.xml><?xml version="1.0" encoding="utf-8"?>
-<p:sld xmlns:a="http://schemas.openxmlformats.org/drawingml/2006/main" xmlns:p="http://schemas.openxmlformats.org/presentationml/2006/main" xmlns:r="http://schemas.openxmlformats.org/officeDocument/2006/relationships">
+<p:sld xmlns:a="http://schemas.openxmlformats.org/drawingml/2006/main" xmlns:r="http://schemas.openxmlformats.org/officeDocument/2006/relationships" xmlns:p="http://schemas.openxmlformats.org/presentationml/2006/main">
   <p:cSld>
     <p:spTree>
       <p:nvGrpSpPr>
@@ -9161,7 +9740,14 @@
         <p:cNvGrpSpPr/>
         <p:nvPr/>
       </p:nvGrpSpPr>
-      <p:grpSpPr/>
+      <p:grpSpPr>
+        <a:xfrm>
+          <a:off x="0" y="0"/>
+          <a:ext cx="0" cy="0"/>
+          <a:chOff x="0" y="0"/>
+          <a:chExt cx="0" cy="0"/>
+        </a:xfrm>
+      </p:grpSpPr>
       <p:sp>
         <p:nvSpPr>
           <p:cNvPr id="2" name="Rectangle 1"/>
@@ -9202,6 +9788,7 @@
           <a:lstStyle/>
           <a:p>
             <a:pPr algn="ctr"/>
+            <a:endParaRPr/>
           </a:p>
         </p:txBody>
       </p:sp>
@@ -9826,6 +10413,7 @@
           <a:lstStyle/>
           <a:p>
             <a:pPr algn="ctr"/>
+            <a:endParaRPr/>
           </a:p>
         </p:txBody>
       </p:sp>
@@ -9904,7 +10492,7 @@
 </file>
 
 <file path=ppt/slides/slide8.xml><?xml version="1.0" encoding="utf-8"?>
-<p:sld xmlns:a="http://schemas.openxmlformats.org/drawingml/2006/main" xmlns:p="http://schemas.openxmlformats.org/presentationml/2006/main" xmlns:r="http://schemas.openxmlformats.org/officeDocument/2006/relationships">
+<p:sld xmlns:a="http://schemas.openxmlformats.org/drawingml/2006/main" xmlns:r="http://schemas.openxmlformats.org/officeDocument/2006/relationships" xmlns:p="http://schemas.openxmlformats.org/presentationml/2006/main">
   <p:cSld>
     <p:spTree>
       <p:nvGrpSpPr>
@@ -9912,7 +10500,14 @@
         <p:cNvGrpSpPr/>
         <p:nvPr/>
       </p:nvGrpSpPr>
-      <p:grpSpPr/>
+      <p:grpSpPr>
+        <a:xfrm>
+          <a:off x="0" y="0"/>
+          <a:ext cx="0" cy="0"/>
+          <a:chOff x="0" y="0"/>
+          <a:chExt cx="0" cy="0"/>
+        </a:xfrm>
+      </p:grpSpPr>
       <p:sp>
         <p:nvSpPr>
           <p:cNvPr id="2" name="Rectangle 1"/>
@@ -9953,6 +10548,7 @@
           <a:lstStyle/>
           <a:p>
             <a:pPr algn="ctr"/>
+            <a:endParaRPr/>
           </a:p>
         </p:txBody>
       </p:sp>
@@ -10062,6 +10658,7 @@
           <a:lstStyle/>
           <a:p>
             <a:pPr algn="ctr"/>
+            <a:endParaRPr/>
           </a:p>
         </p:txBody>
       </p:sp>
@@ -10172,6 +10769,7 @@
           <a:lstStyle/>
           <a:p>
             <a:pPr algn="ctr"/>
+            <a:endParaRPr/>
           </a:p>
         </p:txBody>
       </p:sp>
@@ -10282,6 +10880,7 @@
           <a:lstStyle/>
           <a:p>
             <a:pPr algn="ctr"/>
+            <a:endParaRPr/>
           </a:p>
         </p:txBody>
       </p:sp>
@@ -10392,6 +10991,7 @@
           <a:lstStyle/>
           <a:p>
             <a:pPr algn="ctr"/>
+            <a:endParaRPr/>
           </a:p>
         </p:txBody>
       </p:sp>
@@ -10502,6 +11102,7 @@
           <a:lstStyle/>
           <a:p>
             <a:pPr algn="ctr"/>
+            <a:endParaRPr/>
           </a:p>
         </p:txBody>
       </p:sp>
@@ -10612,6 +11213,7 @@
           <a:lstStyle/>
           <a:p>
             <a:pPr algn="ctr"/>
+            <a:endParaRPr/>
           </a:p>
         </p:txBody>
       </p:sp>
@@ -10844,7 +11446,7 @@
 </file>
 
 <file path=ppt/slides/slide9.xml><?xml version="1.0" encoding="utf-8"?>
-<p:sld xmlns:a="http://schemas.openxmlformats.org/drawingml/2006/main" xmlns:p="http://schemas.openxmlformats.org/presentationml/2006/main" xmlns:r="http://schemas.openxmlformats.org/officeDocument/2006/relationships">
+<p:sld xmlns:a="http://schemas.openxmlformats.org/drawingml/2006/main" xmlns:r="http://schemas.openxmlformats.org/officeDocument/2006/relationships" xmlns:p="http://schemas.openxmlformats.org/presentationml/2006/main">
   <p:cSld>
     <p:spTree>
       <p:nvGrpSpPr>
@@ -10852,7 +11454,14 @@
         <p:cNvGrpSpPr/>
         <p:nvPr/>
       </p:nvGrpSpPr>
-      <p:grpSpPr/>
+      <p:grpSpPr>
+        <a:xfrm>
+          <a:off x="0" y="0"/>
+          <a:ext cx="0" cy="0"/>
+          <a:chOff x="0" y="0"/>
+          <a:chExt cx="0" cy="0"/>
+        </a:xfrm>
+      </p:grpSpPr>
       <p:sp>
         <p:nvSpPr>
           <p:cNvPr id="2" name="Rectangle 1"/>
@@ -10893,6 +11502,7 @@
           <a:lstStyle/>
           <a:p>
             <a:pPr algn="ctr"/>
+            <a:endParaRPr/>
           </a:p>
         </p:txBody>
       </p:sp>
@@ -11002,6 +11612,7 @@
           <a:lstStyle/>
           <a:p>
             <a:pPr algn="ctr"/>
+            <a:endParaRPr/>
           </a:p>
         </p:txBody>
       </p:sp>
@@ -11078,6 +11689,7 @@
           <a:lstStyle/>
           <a:p>
             <a:pPr algn="ctr"/>
+            <a:endParaRPr/>
           </a:p>
         </p:txBody>
       </p:sp>
@@ -11090,7 +11702,7 @@
         <p:spPr>
           <a:xfrm>
             <a:off x="457200" y="1600200"/>
-            <a:ext cx="5212080" cy="2103120"/>
+            <a:ext cx="5212080" cy="1246495"/>
           </a:xfrm>
           <a:prstGeom prst="rect">
             <a:avLst/>
@@ -11109,14 +11721,65 @@
               </a:spcBef>
             </a:pPr>
             <a:r>
-              <a:rPr sz="1300">
-                <a:solidFill>
-                  <a:srgbClr val="222222"/>
-                </a:solidFill>
-                <a:latin typeface="맑은 고딕"/>
-              </a:rPr>
-              <a:t>· 패킷 1개마다 WSASend() 호출</a:t>
-            </a:r>
+              <a:rPr sz="1300" dirty="0">
+                <a:solidFill>
+                  <a:srgbClr val="222222"/>
+                </a:solidFill>
+                <a:latin typeface="맑은 고딕"/>
+              </a:rPr>
+              <a:t>· </a:t>
+            </a:r>
+            <a:r>
+              <a:rPr sz="1300" dirty="0" err="1">
+                <a:solidFill>
+                  <a:srgbClr val="222222"/>
+                </a:solidFill>
+                <a:latin typeface="맑은 고딕"/>
+              </a:rPr>
+              <a:t>패킷</a:t>
+            </a:r>
+            <a:r>
+              <a:rPr sz="1300" dirty="0">
+                <a:solidFill>
+                  <a:srgbClr val="222222"/>
+                </a:solidFill>
+                <a:latin typeface="맑은 고딕"/>
+              </a:rPr>
+              <a:t> 1개마다 </a:t>
+            </a:r>
+            <a:r>
+              <a:rPr sz="1300" dirty="0" err="1">
+                <a:solidFill>
+                  <a:srgbClr val="222222"/>
+                </a:solidFill>
+                <a:latin typeface="맑은 고딕"/>
+              </a:rPr>
+              <a:t>WSASend</a:t>
+            </a:r>
+            <a:r>
+              <a:rPr sz="1300" dirty="0">
+                <a:solidFill>
+                  <a:srgbClr val="222222"/>
+                </a:solidFill>
+                <a:latin typeface="맑은 고딕"/>
+              </a:rPr>
+              <a:t>() </a:t>
+            </a:r>
+            <a:r>
+              <a:rPr sz="1300" dirty="0" err="1">
+                <a:solidFill>
+                  <a:srgbClr val="222222"/>
+                </a:solidFill>
+                <a:latin typeface="맑은 고딕"/>
+              </a:rPr>
+              <a:t>호출</a:t>
+            </a:r>
+            <a:endParaRPr sz="1300" dirty="0">
+              <a:solidFill>
+                <a:srgbClr val="222222"/>
+              </a:solidFill>
+              <a:latin typeface="맑은 고딕"/>
+            </a:endParaRPr>
           </a:p>
           <a:p>
             <a:pPr>
@@ -11125,14 +11788,83 @@
               </a:spcBef>
             </a:pPr>
             <a:r>
-              <a:rPr sz="1300">
-                <a:solidFill>
-                  <a:srgbClr val="222222"/>
-                </a:solidFill>
-                <a:latin typeface="맑은 고딕"/>
-              </a:rPr>
-              <a:t>· N개 NPC 이동 = N번 syscall</a:t>
-            </a:r>
+              <a:rPr sz="1300" dirty="0">
+                <a:solidFill>
+                  <a:srgbClr val="222222"/>
+                </a:solidFill>
+                <a:latin typeface="맑은 고딕"/>
+              </a:rPr>
+              <a:t>· </a:t>
+            </a:r>
+            <a:r>
+              <a:rPr sz="1300" dirty="0" err="1">
+                <a:solidFill>
+                  <a:srgbClr val="222222"/>
+                </a:solidFill>
+                <a:latin typeface="맑은 고딕"/>
+              </a:rPr>
+              <a:t>N개</a:t>
+            </a:r>
+            <a:r>
+              <a:rPr sz="1300" dirty="0">
+                <a:solidFill>
+                  <a:srgbClr val="222222"/>
+                </a:solidFill>
+                <a:latin typeface="맑은 고딕"/>
+              </a:rPr>
+              <a:t> NPC </a:t>
+            </a:r>
+            <a:r>
+              <a:rPr sz="1300" dirty="0" err="1">
+                <a:solidFill>
+                  <a:srgbClr val="222222"/>
+                </a:solidFill>
+                <a:latin typeface="맑은 고딕"/>
+              </a:rPr>
+              <a:t>이동</a:t>
+            </a:r>
+            <a:r>
+              <a:rPr sz="1300" dirty="0">
+                <a:solidFill>
+                  <a:srgbClr val="222222"/>
+                </a:solidFill>
+                <a:latin typeface="맑은 고딕"/>
+              </a:rPr>
+              <a:t> = </a:t>
+            </a:r>
+            <a:r>
+              <a:rPr sz="1300" dirty="0" err="1">
+                <a:solidFill>
+                  <a:srgbClr val="222222"/>
+                </a:solidFill>
+                <a:latin typeface="맑은 고딕"/>
+              </a:rPr>
+              <a:t>N번</a:t>
+            </a:r>
+            <a:r>
+              <a:rPr sz="1300" dirty="0">
+                <a:solidFill>
+                  <a:srgbClr val="222222"/>
+                </a:solidFill>
+                <a:latin typeface="맑은 고딕"/>
+              </a:rPr>
+              <a:t> </a:t>
+            </a:r>
+            <a:r>
+              <a:rPr sz="1300" dirty="0" err="1">
+                <a:solidFill>
+                  <a:srgbClr val="222222"/>
+                </a:solidFill>
+                <a:latin typeface="맑은 고딕"/>
+              </a:rPr>
+              <a:t>syscall</a:t>
+            </a:r>
+            <a:endParaRPr sz="1300" dirty="0">
+              <a:solidFill>
+                <a:srgbClr val="222222"/>
+              </a:solidFill>
+              <a:latin typeface="맑은 고딕"/>
+            </a:endParaRPr>
           </a:p>
           <a:p>
             <a:pPr>
@@ -11141,14 +11873,47 @@
               </a:spcBef>
             </a:pPr>
             <a:r>
-              <a:rPr sz="1300">
-                <a:solidFill>
-                  <a:srgbClr val="222222"/>
-                </a:solidFill>
-                <a:latin typeface="맑은 고딕"/>
-              </a:rPr>
-              <a:t>· 20만 NPC × 시야내 플레이어 수</a:t>
-            </a:r>
+              <a:rPr sz="1300" dirty="0">
+                <a:solidFill>
+                  <a:srgbClr val="222222"/>
+                </a:solidFill>
+                <a:latin typeface="맑은 고딕"/>
+              </a:rPr>
+              <a:t>· </a:t>
+            </a:r>
+            <a:r>
+              <a:rPr lang="en-US" sz="1300" dirty="0">
+                <a:solidFill>
+                  <a:srgbClr val="222222"/>
+                </a:solidFill>
+                <a:latin typeface="맑은 고딕"/>
+              </a:rPr>
+              <a:t>Send </a:t>
+            </a:r>
+            <a:r>
+              <a:rPr lang="ko-KR" altLang="en-US" sz="1300" dirty="0" err="1">
+                <a:solidFill>
+                  <a:srgbClr val="222222"/>
+                </a:solidFill>
+                <a:latin typeface="맑은 고딕"/>
+              </a:rPr>
+              <a:t>콜링이</a:t>
+            </a:r>
+            <a:r>
+              <a:rPr lang="ko-KR" altLang="en-US" sz="1300" dirty="0">
+                <a:solidFill>
+                  <a:srgbClr val="222222"/>
+                </a:solidFill>
+                <a:latin typeface="맑은 고딕"/>
+              </a:rPr>
+              <a:t> 플레이어 증가시에 비례에서 가파르게 호출 빈도가 상승했음</a:t>
+            </a:r>
+            <a:endParaRPr lang="en-US" sz="1300" dirty="0">
+              <a:solidFill>
+                <a:srgbClr val="222222"/>
+              </a:solidFill>
+              <a:latin typeface="맑은 고딕"/>
+            </a:endParaRPr>
           </a:p>
           <a:p>
             <a:pPr>
@@ -11157,30 +11922,83 @@
               </a:spcBef>
             </a:pPr>
             <a:r>
-              <a:rPr sz="1300">
-                <a:solidFill>
-                  <a:srgbClr val="222222"/>
-                </a:solidFill>
-                <a:latin typeface="맑은 고딕"/>
-              </a:rPr>
-              <a:t>  → 초당 수백만 WSASend 가능</a:t>
-            </a:r>
-          </a:p>
-          <a:p>
-            <a:pPr>
-              <a:spcBef>
-                <a:spcPts val="400"/>
-              </a:spcBef>
-            </a:pPr>
-            <a:r>
-              <a:rPr sz="1300">
-                <a:solidFill>
-                  <a:srgbClr val="222222"/>
-                </a:solidFill>
-                <a:latin typeface="맑은 고딕"/>
-              </a:rPr>
-              <a:t>· CPU 사용률 급증 / 레이턴시 불안정</a:t>
-            </a:r>
+              <a:rPr sz="1300" dirty="0">
+                <a:solidFill>
+                  <a:srgbClr val="222222"/>
+                </a:solidFill>
+                <a:latin typeface="맑은 고딕"/>
+              </a:rPr>
+              <a:t>· CPU </a:t>
+            </a:r>
+            <a:r>
+              <a:rPr sz="1300" dirty="0" err="1">
+                <a:solidFill>
+                  <a:srgbClr val="222222"/>
+                </a:solidFill>
+                <a:latin typeface="맑은 고딕"/>
+              </a:rPr>
+              <a:t>사용률</a:t>
+            </a:r>
+            <a:r>
+              <a:rPr sz="1300" dirty="0">
+                <a:solidFill>
+                  <a:srgbClr val="222222"/>
+                </a:solidFill>
+                <a:latin typeface="맑은 고딕"/>
+              </a:rPr>
+              <a:t> </a:t>
+            </a:r>
+            <a:r>
+              <a:rPr sz="1300" dirty="0" err="1">
+                <a:solidFill>
+                  <a:srgbClr val="222222"/>
+                </a:solidFill>
+                <a:latin typeface="맑은 고딕"/>
+              </a:rPr>
+              <a:t>급증</a:t>
+            </a:r>
+            <a:r>
+              <a:rPr sz="1300" dirty="0">
+                <a:solidFill>
+                  <a:srgbClr val="222222"/>
+                </a:solidFill>
+                <a:latin typeface="맑은 고딕"/>
+              </a:rPr>
+              <a:t> / </a:t>
+            </a:r>
+            <a:r>
+              <a:rPr sz="1300" dirty="0" err="1">
+                <a:solidFill>
+                  <a:srgbClr val="222222"/>
+                </a:solidFill>
+                <a:latin typeface="맑은 고딕"/>
+              </a:rPr>
+              <a:t>레이턴시</a:t>
+            </a:r>
+            <a:r>
+              <a:rPr sz="1300" dirty="0">
+                <a:solidFill>
+                  <a:srgbClr val="222222"/>
+                </a:solidFill>
+                <a:latin typeface="맑은 고딕"/>
+              </a:rPr>
+              <a:t> </a:t>
+            </a:r>
+            <a:r>
+              <a:rPr sz="1300" dirty="0" err="1">
+                <a:solidFill>
+                  <a:srgbClr val="222222"/>
+                </a:solidFill>
+                <a:latin typeface="맑은 고딕"/>
+              </a:rPr>
+              <a:t>불안정</a:t>
+            </a:r>
+            <a:endParaRPr sz="1300" dirty="0">
+              <a:solidFill>
+                <a:srgbClr val="222222"/>
+              </a:solidFill>
+              <a:latin typeface="맑은 고딕"/>
+            </a:endParaRPr>
           </a:p>
         </p:txBody>
       </p:sp>
@@ -11248,6 +12066,7 @@
           <a:lstStyle/>
           <a:p>
             <a:pPr algn="ctr"/>
+            <a:endParaRPr/>
           </a:p>
         </p:txBody>
       </p:sp>
@@ -11324,6 +12143,7 @@
           <a:lstStyle/>
           <a:p>
             <a:pPr algn="ctr"/>
+            <a:endParaRPr/>
           </a:p>
         </p:txBody>
       </p:sp>
@@ -11336,7 +12156,7 @@
         <p:spPr>
           <a:xfrm>
             <a:off x="6492240" y="1600200"/>
-            <a:ext cx="5212080" cy="2103120"/>
+            <a:ext cx="5212080" cy="1800493"/>
           </a:xfrm>
           <a:prstGeom prst="rect">
             <a:avLst/>
@@ -11355,14 +12175,65 @@
               </a:spcBef>
             </a:pPr>
             <a:r>
-              <a:rPr sz="1300">
-                <a:solidFill>
-                  <a:srgbClr val="222222"/>
-                </a:solidFill>
-                <a:latin typeface="맑은 고딕"/>
-              </a:rPr>
-              <a:t>· send_queue에 패킷 누적</a:t>
-            </a:r>
+              <a:rPr sz="1300" dirty="0">
+                <a:solidFill>
+                  <a:srgbClr val="222222"/>
+                </a:solidFill>
+                <a:latin typeface="맑은 고딕"/>
+              </a:rPr>
+              <a:t>· </a:t>
+            </a:r>
+            <a:r>
+              <a:rPr sz="1300" dirty="0" err="1">
+                <a:solidFill>
+                  <a:srgbClr val="222222"/>
+                </a:solidFill>
+                <a:latin typeface="맑은 고딕"/>
+              </a:rPr>
+              <a:t>send_queue에</a:t>
+            </a:r>
+            <a:r>
+              <a:rPr sz="1300" dirty="0">
+                <a:solidFill>
+                  <a:srgbClr val="222222"/>
+                </a:solidFill>
+                <a:latin typeface="맑은 고딕"/>
+              </a:rPr>
+              <a:t> </a:t>
+            </a:r>
+            <a:r>
+              <a:rPr sz="1300" dirty="0" err="1">
+                <a:solidFill>
+                  <a:srgbClr val="222222"/>
+                </a:solidFill>
+                <a:latin typeface="맑은 고딕"/>
+              </a:rPr>
+              <a:t>패킷</a:t>
+            </a:r>
+            <a:r>
+              <a:rPr sz="1300" dirty="0">
+                <a:solidFill>
+                  <a:srgbClr val="222222"/>
+                </a:solidFill>
+                <a:latin typeface="맑은 고딕"/>
+              </a:rPr>
+              <a:t> </a:t>
+            </a:r>
+            <a:r>
+              <a:rPr sz="1300" dirty="0" err="1">
+                <a:solidFill>
+                  <a:srgbClr val="222222"/>
+                </a:solidFill>
+                <a:latin typeface="맑은 고딕"/>
+              </a:rPr>
+              <a:t>누적</a:t>
+            </a:r>
+            <a:endParaRPr sz="1300" dirty="0">
+              <a:solidFill>
+                <a:srgbClr val="222222"/>
+              </a:solidFill>
+              <a:latin typeface="맑은 고딕"/>
+            </a:endParaRPr>
           </a:p>
           <a:p>
             <a:pPr>
@@ -11371,14 +12242,47 @@
               </a:spcBef>
             </a:pPr>
             <a:r>
-              <a:rPr sz="1300">
-                <a:solidFill>
-                  <a:srgbClr val="222222"/>
-                </a:solidFill>
-                <a:latin typeface="맑은 고딕"/>
-              </a:rPr>
-              <a:t>· SEND_BATCH_SIZE 단위로 병합</a:t>
-            </a:r>
+              <a:rPr sz="1300" dirty="0">
+                <a:solidFill>
+                  <a:srgbClr val="222222"/>
+                </a:solidFill>
+                <a:latin typeface="맑은 고딕"/>
+              </a:rPr>
+              <a:t>· SEND_BATCH_SIZE </a:t>
+            </a:r>
+            <a:r>
+              <a:rPr sz="1300" dirty="0" err="1">
+                <a:solidFill>
+                  <a:srgbClr val="222222"/>
+                </a:solidFill>
+                <a:latin typeface="맑은 고딕"/>
+              </a:rPr>
+              <a:t>단위로</a:t>
+            </a:r>
+            <a:r>
+              <a:rPr sz="1300" dirty="0">
+                <a:solidFill>
+                  <a:srgbClr val="222222"/>
+                </a:solidFill>
+                <a:latin typeface="맑은 고딕"/>
+              </a:rPr>
+              <a:t> </a:t>
+            </a:r>
+            <a:r>
+              <a:rPr sz="1300" dirty="0" err="1">
+                <a:solidFill>
+                  <a:srgbClr val="222222"/>
+                </a:solidFill>
+                <a:latin typeface="맑은 고딕"/>
+              </a:rPr>
+              <a:t>병합</a:t>
+            </a:r>
+            <a:endParaRPr sz="1300" dirty="0">
+              <a:solidFill>
+                <a:srgbClr val="222222"/>
+              </a:solidFill>
+              <a:latin typeface="맑은 고딕"/>
+            </a:endParaRPr>
           </a:p>
           <a:p>
             <a:pPr>
@@ -11387,14 +12291,83 @@
               </a:spcBef>
             </a:pPr>
             <a:r>
-              <a:rPr sz="1300">
-                <a:solidFill>
-                  <a:srgbClr val="222222"/>
-                </a:solidFill>
-                <a:latin typeface="맑은 고딕"/>
-              </a:rPr>
-              <a:t>· 하나의 WSASend로 일괄 전송</a:t>
-            </a:r>
+              <a:rPr sz="1300" dirty="0">
+                <a:solidFill>
+                  <a:srgbClr val="222222"/>
+                </a:solidFill>
+                <a:latin typeface="맑은 고딕"/>
+              </a:rPr>
+              <a:t>· </a:t>
+            </a:r>
+            <a:r>
+              <a:rPr sz="1300" dirty="0" err="1">
+                <a:solidFill>
+                  <a:srgbClr val="222222"/>
+                </a:solidFill>
+                <a:latin typeface="맑은 고딕"/>
+              </a:rPr>
+              <a:t>하나의</a:t>
+            </a:r>
+            <a:r>
+              <a:rPr sz="1300" dirty="0">
+                <a:solidFill>
+                  <a:srgbClr val="222222"/>
+                </a:solidFill>
+                <a:latin typeface="맑은 고딕"/>
+              </a:rPr>
+              <a:t> </a:t>
+            </a:r>
+            <a:r>
+              <a:rPr sz="1300" dirty="0" err="1">
+                <a:solidFill>
+                  <a:srgbClr val="222222"/>
+                </a:solidFill>
+                <a:latin typeface="맑은 고딕"/>
+              </a:rPr>
+              <a:t>WSASend로</a:t>
+            </a:r>
+            <a:r>
+              <a:rPr sz="1300" dirty="0">
+                <a:solidFill>
+                  <a:srgbClr val="222222"/>
+                </a:solidFill>
+                <a:latin typeface="맑은 고딕"/>
+              </a:rPr>
+              <a:t> </a:t>
+            </a:r>
+            <a:r>
+              <a:rPr sz="1300" dirty="0" err="1">
+                <a:solidFill>
+                  <a:srgbClr val="222222"/>
+                </a:solidFill>
+                <a:latin typeface="맑은 고딕"/>
+              </a:rPr>
+              <a:t>일괄</a:t>
+            </a:r>
+            <a:r>
+              <a:rPr sz="1300" dirty="0">
+                <a:solidFill>
+                  <a:srgbClr val="222222"/>
+                </a:solidFill>
+                <a:latin typeface="맑은 고딕"/>
+              </a:rPr>
+              <a:t> </a:t>
+            </a:r>
+            <a:r>
+              <a:rPr sz="1300" dirty="0" err="1">
+                <a:solidFill>
+                  <a:srgbClr val="222222"/>
+                </a:solidFill>
+                <a:latin typeface="맑은 고딕"/>
+              </a:rPr>
+              <a:t>전송</a:t>
+            </a:r>
+            <a:endParaRPr sz="1300" dirty="0">
+              <a:solidFill>
+                <a:srgbClr val="222222"/>
+              </a:solidFill>
+              <a:latin typeface="맑은 고딕"/>
+            </a:endParaRPr>
           </a:p>
           <a:p>
             <a:pPr>
@@ -11403,14 +12376,101 @@
               </a:spcBef>
             </a:pPr>
             <a:r>
-              <a:rPr sz="1300">
-                <a:solidFill>
-                  <a:srgbClr val="222222"/>
-                </a:solidFill>
-                <a:latin typeface="맑은 고딕"/>
-              </a:rPr>
-              <a:t>· IO 완료 후 잔여 패킷 자동 재전송</a:t>
-            </a:r>
+              <a:rPr sz="1300" dirty="0">
+                <a:solidFill>
+                  <a:srgbClr val="222222"/>
+                </a:solidFill>
+                <a:latin typeface="맑은 고딕"/>
+              </a:rPr>
+              <a:t>· IO </a:t>
+            </a:r>
+            <a:r>
+              <a:rPr sz="1300" dirty="0" err="1">
+                <a:solidFill>
+                  <a:srgbClr val="222222"/>
+                </a:solidFill>
+                <a:latin typeface="맑은 고딕"/>
+              </a:rPr>
+              <a:t>완료</a:t>
+            </a:r>
+            <a:r>
+              <a:rPr sz="1300" dirty="0">
+                <a:solidFill>
+                  <a:srgbClr val="222222"/>
+                </a:solidFill>
+                <a:latin typeface="맑은 고딕"/>
+              </a:rPr>
+              <a:t> 후 </a:t>
+            </a:r>
+            <a:r>
+              <a:rPr sz="1300" dirty="0" err="1">
+                <a:solidFill>
+                  <a:srgbClr val="222222"/>
+                </a:solidFill>
+                <a:latin typeface="맑은 고딕"/>
+              </a:rPr>
+              <a:t>잔여</a:t>
+            </a:r>
+            <a:r>
+              <a:rPr sz="1300" dirty="0">
+                <a:solidFill>
+                  <a:srgbClr val="222222"/>
+                </a:solidFill>
+                <a:latin typeface="맑은 고딕"/>
+              </a:rPr>
+              <a:t> </a:t>
+            </a:r>
+            <a:r>
+              <a:rPr sz="1300" dirty="0" err="1">
+                <a:solidFill>
+                  <a:srgbClr val="222222"/>
+                </a:solidFill>
+                <a:latin typeface="맑은 고딕"/>
+              </a:rPr>
+              <a:t>패킷</a:t>
+            </a:r>
+            <a:r>
+              <a:rPr sz="1300" dirty="0">
+                <a:solidFill>
+                  <a:srgbClr val="222222"/>
+                </a:solidFill>
+                <a:latin typeface="맑은 고딕"/>
+              </a:rPr>
+              <a:t> </a:t>
+            </a:r>
+            <a:r>
+              <a:rPr sz="1300" dirty="0" err="1">
+                <a:solidFill>
+                  <a:srgbClr val="222222"/>
+                </a:solidFill>
+                <a:latin typeface="맑은 고딕"/>
+              </a:rPr>
+              <a:t>자동</a:t>
+            </a:r>
+            <a:r>
+              <a:rPr sz="1300" dirty="0">
+                <a:solidFill>
+                  <a:srgbClr val="222222"/>
+                </a:solidFill>
+                <a:latin typeface="맑은 고딕"/>
+              </a:rPr>
+              <a:t> </a:t>
+            </a:r>
+            <a:r>
+              <a:rPr sz="1300" dirty="0" err="1">
+                <a:solidFill>
+                  <a:srgbClr val="222222"/>
+                </a:solidFill>
+                <a:latin typeface="맑은 고딕"/>
+              </a:rPr>
+              <a:t>재전송</a:t>
+            </a:r>
+            <a:endParaRPr sz="1300" dirty="0">
+              <a:solidFill>
+                <a:srgbClr val="222222"/>
+              </a:solidFill>
+              <a:latin typeface="맑은 고딕"/>
+            </a:endParaRPr>
           </a:p>
           <a:p>
             <a:pPr>
@@ -11419,14 +12479,163 @@
               </a:spcBef>
             </a:pPr>
             <a:r>
-              <a:rPr sz="1300">
-                <a:solidFill>
-                  <a:srgbClr val="222222"/>
-                </a:solidFill>
-                <a:latin typeface="맑은 고딕"/>
-              </a:rPr>
-              <a:t>· syscall 횟수 대폭 감소</a:t>
-            </a:r>
+              <a:rPr sz="1300" dirty="0">
+                <a:solidFill>
+                  <a:srgbClr val="222222"/>
+                </a:solidFill>
+                <a:latin typeface="맑은 고딕"/>
+              </a:rPr>
+              <a:t>·</a:t>
+            </a:r>
+            <a:r>
+              <a:rPr lang="en-US" sz="1300" dirty="0">
+                <a:solidFill>
+                  <a:srgbClr val="222222"/>
+                </a:solidFill>
+                <a:latin typeface="맑은 고딕"/>
+              </a:rPr>
+              <a:t> </a:t>
+            </a:r>
+            <a:r>
+              <a:rPr lang="ko-KR" altLang="en-US" sz="1300" dirty="0" err="1">
+                <a:solidFill>
+                  <a:srgbClr val="222222"/>
+                </a:solidFill>
+                <a:latin typeface="맑은 고딕"/>
+              </a:rPr>
+              <a:t>콜링</a:t>
+            </a:r>
+            <a:r>
+              <a:rPr lang="ko-KR" altLang="en-US" sz="1300" dirty="0">
+                <a:solidFill>
+                  <a:srgbClr val="222222"/>
+                </a:solidFill>
+                <a:latin typeface="맑은 고딕"/>
+              </a:rPr>
+              <a:t> 횟수를 절대적으로 줄일 수 있었음</a:t>
+            </a:r>
+            <a:endParaRPr lang="en-US" altLang="ko-KR" sz="1300" dirty="0">
+              <a:solidFill>
+                <a:srgbClr val="222222"/>
+              </a:solidFill>
+              <a:latin typeface="맑은 고딕"/>
+            </a:endParaRPr>
+          </a:p>
+          <a:p>
+            <a:pPr>
+              <a:spcBef>
+                <a:spcPts val="400"/>
+              </a:spcBef>
+            </a:pPr>
+            <a:r>
+              <a:rPr lang="en-US" altLang="ko-KR" sz="1300" dirty="0">
+                <a:solidFill>
+                  <a:srgbClr val="222222"/>
+                </a:solidFill>
+                <a:latin typeface="맑은 고딕"/>
+              </a:rPr>
+              <a:t>· </a:t>
+            </a:r>
+            <a:r>
+              <a:rPr lang="ko-KR" altLang="en-US" sz="1300" dirty="0">
+                <a:solidFill>
+                  <a:srgbClr val="222222"/>
+                </a:solidFill>
+                <a:latin typeface="맑은 고딕"/>
+              </a:rPr>
+              <a:t>부하가 커질 경우 한번의 전송 이 느려지며 </a:t>
+            </a:r>
+            <a:r>
+              <a:rPr lang="en-US" altLang="ko-KR" sz="1300" dirty="0">
+                <a:solidFill>
+                  <a:srgbClr val="222222"/>
+                </a:solidFill>
+                <a:latin typeface="맑은 고딕"/>
+              </a:rPr>
+              <a:t>delay </a:t>
+            </a:r>
+            <a:r>
+              <a:rPr lang="ko-KR" altLang="en-US" sz="1300" dirty="0">
+                <a:solidFill>
+                  <a:srgbClr val="222222"/>
+                </a:solidFill>
+                <a:latin typeface="맑은 고딕"/>
+              </a:rPr>
+              <a:t>발생</a:t>
+            </a:r>
+            <a:endParaRPr lang="en-US" altLang="ko-KR" sz="1300" dirty="0">
+              <a:solidFill>
+                <a:srgbClr val="222222"/>
+              </a:solidFill>
+              <a:latin typeface="맑은 고딕"/>
+            </a:endParaRPr>
+          </a:p>
+          <a:p>
+            <a:pPr>
+              <a:spcBef>
+                <a:spcPts val="400"/>
+              </a:spcBef>
+            </a:pPr>
+            <a:r>
+              <a:rPr lang="en-US" altLang="ko-KR" sz="1300" dirty="0">
+                <a:solidFill>
+                  <a:srgbClr val="222222"/>
+                </a:solidFill>
+                <a:latin typeface="맑은 고딕"/>
+              </a:rPr>
+              <a:t>· </a:t>
+            </a:r>
+            <a:r>
+              <a:rPr lang="ko-KR" altLang="en-US" sz="1300" dirty="0">
+                <a:solidFill>
+                  <a:srgbClr val="222222"/>
+                </a:solidFill>
+                <a:latin typeface="맑은 고딕"/>
+              </a:rPr>
+              <a:t>그럼에도 </a:t>
+            </a:r>
+            <a:r>
+              <a:rPr lang="en-US" altLang="ko-KR" sz="1300" dirty="0">
+                <a:solidFill>
+                  <a:srgbClr val="222222"/>
+                </a:solidFill>
+                <a:latin typeface="맑은 고딕"/>
+              </a:rPr>
+              <a:t>8000</a:t>
+            </a:r>
+            <a:r>
+              <a:rPr lang="ko-KR" altLang="en-US" sz="1300" dirty="0">
+                <a:solidFill>
+                  <a:srgbClr val="222222"/>
+                </a:solidFill>
+                <a:latin typeface="맑은 고딕"/>
+              </a:rPr>
+              <a:t>명 대로</a:t>
+            </a:r>
+            <a:r>
+              <a:rPr lang="en-US" altLang="ko-KR" sz="1300" dirty="0">
+                <a:solidFill>
+                  <a:srgbClr val="222222"/>
+                </a:solidFill>
+                <a:latin typeface="맑은 고딕"/>
+              </a:rPr>
+              <a:t>, </a:t>
+            </a:r>
+            <a:r>
+              <a:rPr lang="ko-KR" altLang="en-US" sz="1300" dirty="0">
+                <a:solidFill>
+                  <a:srgbClr val="222222"/>
+                </a:solidFill>
+                <a:latin typeface="맑은 고딕"/>
+              </a:rPr>
+              <a:t>확연히 개선되었음</a:t>
+            </a:r>
+            <a:endParaRPr lang="en-US" altLang="ko-KR" sz="1300" dirty="0">
+              <a:solidFill>
+                <a:srgbClr val="222222"/>
+              </a:solidFill>
+              <a:latin typeface="맑은 고딕"/>
+            </a:endParaRPr>
           </a:p>
         </p:txBody>
       </p:sp>
